--- a/bigtree/samples/bigtree_lab_sample.pptx
+++ b/bigtree/samples/bigtree_lab_sample.pptx
@@ -631,7 +631,7 @@
           <a:p>
             <a:r>
               <a:rPr lang="ja-JP"/>
-              <a:t>2026-09-20 ｜ Bigtree Lab ｜ だいき君</a:t>
+              <a:t>2026-09-18 ｜ Bigtree Lab ｜ だいき君</a:t>
             </a:r>
           </a:p>
         </p:txBody>
@@ -3517,7 +3517,7 @@
           <a:p>
             <a:r>
               <a:rPr lang="ja-JP"/>
-              <a:t>2026-09-20 ｜ Bigtree Lab ｜ だいき君</a:t>
+              <a:t>2026-09-18 ｜ Bigtree Lab ｜ だいき君</a:t>
             </a:r>
           </a:p>
         </p:txBody>

--- a/bigtree/samples/bigtree_lab_sample.pptx
+++ b/bigtree/samples/bigtree_lab_sample.pptx
@@ -224,129 +224,129 @@
             <a:cxnLst/>
             <a:rect l="0" t="0" r="r" b="b"/>
             <a:pathLst>
-              <a:path w="41660" h="54887">
+              <a:path w="347028" h="457200">
                 <a:moveTo>
-                  <a:pt x="1000" y="3887"/>
+                  <a:pt x="8330" y="32378"/>
                 </a:moveTo>
                 <a:lnTo>
-                  <a:pt x="1000" y="13887"/>
-                </a:lnTo>
-                <a:lnTo>
-                  <a:pt x="6000" y="16774"/>
-                </a:lnTo>
-                <a:lnTo>
-                  <a:pt x="6000" y="13887"/>
-                </a:lnTo>
-                <a:lnTo>
-                  <a:pt x="6000" y="8887"/>
-                </a:lnTo>
-                <a:lnTo>
-                  <a:pt x="23321" y="18887"/>
-                </a:lnTo>
-                <a:lnTo>
-                  <a:pt x="14660" y="23887"/>
-                </a:lnTo>
-                <a:lnTo>
-                  <a:pt x="15000" y="23887"/>
-                </a:lnTo>
-                <a:lnTo>
-                  <a:pt x="32320" y="33887"/>
-                </a:lnTo>
-                <a:lnTo>
-                  <a:pt x="23660" y="38887"/>
-                </a:lnTo>
-                <a:lnTo>
-                  <a:pt x="32000" y="38887"/>
-                </a:lnTo>
-                <a:lnTo>
-                  <a:pt x="40660" y="33887"/>
-                </a:lnTo>
-                <a:lnTo>
-                  <a:pt x="23340" y="23887"/>
-                </a:lnTo>
-                <a:lnTo>
-                  <a:pt x="32000" y="18887"/>
-                </a:lnTo>
-                <a:lnTo>
-                  <a:pt x="31981" y="18887"/>
-                </a:lnTo>
-                <a:lnTo>
-                  <a:pt x="14660" y="8887"/>
-                </a:lnTo>
-                <a:lnTo>
-                  <a:pt x="6000" y="3887"/>
-                </a:lnTo>
-                <a:lnTo>
-                  <a:pt x="1000" y="1000"/>
+                  <a:pt x="8330" y="115676"/>
+                </a:lnTo>
+                <a:lnTo>
+                  <a:pt x="49980" y="139724"/>
+                </a:lnTo>
+                <a:lnTo>
+                  <a:pt x="49980" y="115676"/>
+                </a:lnTo>
+                <a:lnTo>
+                  <a:pt x="49980" y="74027"/>
+                </a:lnTo>
+                <a:lnTo>
+                  <a:pt x="194264" y="157325"/>
+                </a:lnTo>
+                <a:lnTo>
+                  <a:pt x="122117" y="198974"/>
+                </a:lnTo>
+                <a:lnTo>
+                  <a:pt x="124950" y="198974"/>
+                </a:lnTo>
+                <a:lnTo>
+                  <a:pt x="269234" y="282273"/>
+                </a:lnTo>
+                <a:lnTo>
+                  <a:pt x="197087" y="323922"/>
+                </a:lnTo>
+                <a:lnTo>
+                  <a:pt x="266560" y="323922"/>
+                </a:lnTo>
+                <a:lnTo>
+                  <a:pt x="338697" y="282273"/>
+                </a:lnTo>
+                <a:lnTo>
+                  <a:pt x="194422" y="198974"/>
+                </a:lnTo>
+                <a:lnTo>
+                  <a:pt x="266560" y="157325"/>
+                </a:lnTo>
+                <a:lnTo>
+                  <a:pt x="266401" y="157325"/>
+                </a:lnTo>
+                <a:lnTo>
+                  <a:pt x="122117" y="74027"/>
+                </a:lnTo>
+                <a:lnTo>
+                  <a:pt x="49980" y="32378"/>
+                </a:lnTo>
+                <a:lnTo>
+                  <a:pt x="8330" y="8329"/>
                 </a:lnTo>
                 <a:close/>
               </a:path>
-              <a:path w="41660" h="54887">
+              <a:path w="347028" h="457200">
                 <a:moveTo>
-                  <a:pt x="11000" y="38887"/>
+                  <a:pt x="91630" y="323922"/>
                 </a:moveTo>
                 <a:lnTo>
-                  <a:pt x="16000" y="38887"/>
-                </a:lnTo>
-                <a:lnTo>
-                  <a:pt x="17340" y="38887"/>
-                </a:lnTo>
-                <a:lnTo>
-                  <a:pt x="26000" y="33887"/>
-                </a:lnTo>
-                <a:lnTo>
-                  <a:pt x="16000" y="33887"/>
-                </a:lnTo>
-                <a:lnTo>
-                  <a:pt x="16000" y="28887"/>
-                </a:lnTo>
-                <a:lnTo>
-                  <a:pt x="11000" y="26000"/>
+                  <a:pt x="133280" y="323922"/>
+                </a:lnTo>
+                <a:lnTo>
+                  <a:pt x="144442" y="323922"/>
+                </a:lnTo>
+                <a:lnTo>
+                  <a:pt x="216580" y="282273"/>
+                </a:lnTo>
+                <a:lnTo>
+                  <a:pt x="133280" y="282273"/>
+                </a:lnTo>
+                <a:lnTo>
+                  <a:pt x="133280" y="240624"/>
+                </a:lnTo>
+                <a:lnTo>
+                  <a:pt x="91630" y="216575"/>
                 </a:lnTo>
                 <a:close/>
               </a:path>
-              <a:path w="41660" h="54887">
+              <a:path w="347028" h="457200">
                 <a:moveTo>
-                  <a:pt x="6000" y="21774"/>
+                  <a:pt x="49980" y="181373"/>
                 </a:moveTo>
                 <a:lnTo>
-                  <a:pt x="1000" y="18887"/>
-                </a:lnTo>
-                <a:lnTo>
-                  <a:pt x="1000" y="43887"/>
-                </a:lnTo>
-                <a:lnTo>
-                  <a:pt x="1000" y="48887"/>
-                </a:lnTo>
-                <a:lnTo>
-                  <a:pt x="1000" y="53887"/>
-                </a:lnTo>
-                <a:lnTo>
-                  <a:pt x="18113" y="53887"/>
-                </a:lnTo>
-                <a:lnTo>
-                  <a:pt x="21000" y="48887"/>
-                </a:lnTo>
-                <a:lnTo>
-                  <a:pt x="6000" y="48887"/>
-                </a:lnTo>
-                <a:lnTo>
-                  <a:pt x="6000" y="43887"/>
+                  <a:pt x="8330" y="157325"/>
+                </a:lnTo>
+                <a:lnTo>
+                  <a:pt x="8330" y="365571"/>
+                </a:lnTo>
+                <a:lnTo>
+                  <a:pt x="8330" y="407220"/>
+                </a:lnTo>
+                <a:lnTo>
+                  <a:pt x="8330" y="448870"/>
+                </a:lnTo>
+                <a:lnTo>
+                  <a:pt x="150881" y="448870"/>
+                </a:lnTo>
+                <a:lnTo>
+                  <a:pt x="174930" y="407220"/>
+                </a:lnTo>
+                <a:lnTo>
+                  <a:pt x="49980" y="407220"/>
+                </a:lnTo>
+                <a:lnTo>
+                  <a:pt x="49980" y="365571"/>
                 </a:lnTo>
                 <a:close/>
               </a:path>
-              <a:path w="41660" h="54887">
+              <a:path w="347028" h="457200">
                 <a:moveTo>
-                  <a:pt x="23113" y="53887"/>
+                  <a:pt x="192531" y="448870"/>
                 </a:moveTo>
                 <a:lnTo>
-                  <a:pt x="26000" y="48887"/>
-                </a:lnTo>
-                <a:lnTo>
-                  <a:pt x="23000" y="48887"/>
-                </a:lnTo>
-                <a:lnTo>
-                  <a:pt x="20113" y="53887"/>
+                  <a:pt x="216580" y="407220"/>
+                </a:lnTo>
+                <a:lnTo>
+                  <a:pt x="191590" y="407220"/>
+                </a:lnTo>
+                <a:lnTo>
+                  <a:pt x="167541" y="448870"/>
                 </a:lnTo>
                 <a:close/>
               </a:path>
@@ -749,129 +749,129 @@
             <a:cxnLst/>
             <a:rect l="0" t="0" r="r" b="b"/>
             <a:pathLst>
-              <a:path w="41660" h="54887">
+              <a:path w="3123184" h="4114800">
                 <a:moveTo>
-                  <a:pt x="1000" y="3887"/>
+                  <a:pt x="74968" y="291402"/>
                 </a:moveTo>
                 <a:lnTo>
-                  <a:pt x="1000" y="13887"/>
-                </a:lnTo>
-                <a:lnTo>
-                  <a:pt x="6000" y="16774"/>
-                </a:lnTo>
-                <a:lnTo>
-                  <a:pt x="6000" y="13887"/>
-                </a:lnTo>
-                <a:lnTo>
-                  <a:pt x="6000" y="8887"/>
-                </a:lnTo>
-                <a:lnTo>
-                  <a:pt x="23321" y="18887"/>
-                </a:lnTo>
-                <a:lnTo>
-                  <a:pt x="14660" y="23887"/>
-                </a:lnTo>
-                <a:lnTo>
-                  <a:pt x="15000" y="23887"/>
-                </a:lnTo>
-                <a:lnTo>
-                  <a:pt x="32320" y="33887"/>
-                </a:lnTo>
-                <a:lnTo>
-                  <a:pt x="23660" y="38887"/>
-                </a:lnTo>
-                <a:lnTo>
-                  <a:pt x="32000" y="38887"/>
-                </a:lnTo>
-                <a:lnTo>
-                  <a:pt x="40660" y="33887"/>
-                </a:lnTo>
-                <a:lnTo>
-                  <a:pt x="23340" y="23887"/>
-                </a:lnTo>
-                <a:lnTo>
-                  <a:pt x="32000" y="18887"/>
-                </a:lnTo>
-                <a:lnTo>
-                  <a:pt x="31981" y="18887"/>
-                </a:lnTo>
-                <a:lnTo>
-                  <a:pt x="14660" y="8887"/>
-                </a:lnTo>
-                <a:lnTo>
-                  <a:pt x="6000" y="3887"/>
-                </a:lnTo>
-                <a:lnTo>
-                  <a:pt x="1000" y="1000"/>
+                  <a:pt x="74968" y="1041088"/>
+                </a:lnTo>
+                <a:lnTo>
+                  <a:pt x="449810" y="1257522"/>
+                </a:lnTo>
+                <a:lnTo>
+                  <a:pt x="449810" y="1041088"/>
+                </a:lnTo>
+                <a:lnTo>
+                  <a:pt x="449810" y="666245"/>
+                </a:lnTo>
+                <a:lnTo>
+                  <a:pt x="1748338" y="1415931"/>
+                </a:lnTo>
+                <a:lnTo>
+                  <a:pt x="1099036" y="1790774"/>
+                </a:lnTo>
+                <a:lnTo>
+                  <a:pt x="1124526" y="1790774"/>
+                </a:lnTo>
+                <a:lnTo>
+                  <a:pt x="2423054" y="2540459"/>
+                </a:lnTo>
+                <a:lnTo>
+                  <a:pt x="1773752" y="2915302"/>
+                </a:lnTo>
+                <a:lnTo>
+                  <a:pt x="2398989" y="2915302"/>
+                </a:lnTo>
+                <a:lnTo>
+                  <a:pt x="3048215" y="2540459"/>
+                </a:lnTo>
+                <a:lnTo>
+                  <a:pt x="1749762" y="1790774"/>
+                </a:lnTo>
+                <a:lnTo>
+                  <a:pt x="2398989" y="1415931"/>
+                </a:lnTo>
+                <a:lnTo>
+                  <a:pt x="2397564" y="1415931"/>
+                </a:lnTo>
+                <a:lnTo>
+                  <a:pt x="1099036" y="666245"/>
+                </a:lnTo>
+                <a:lnTo>
+                  <a:pt x="449810" y="291402"/>
+                </a:lnTo>
+                <a:lnTo>
+                  <a:pt x="74968" y="74968"/>
                 </a:lnTo>
                 <a:close/>
               </a:path>
-              <a:path w="41660" h="54887">
+              <a:path w="3123184" h="4114800">
                 <a:moveTo>
-                  <a:pt x="11000" y="38887"/>
+                  <a:pt x="824652" y="2915302"/>
                 </a:moveTo>
                 <a:lnTo>
-                  <a:pt x="16000" y="38887"/>
-                </a:lnTo>
-                <a:lnTo>
-                  <a:pt x="17340" y="38887"/>
-                </a:lnTo>
-                <a:lnTo>
-                  <a:pt x="26000" y="33887"/>
-                </a:lnTo>
-                <a:lnTo>
-                  <a:pt x="16000" y="33887"/>
-                </a:lnTo>
-                <a:lnTo>
-                  <a:pt x="16000" y="28887"/>
-                </a:lnTo>
-                <a:lnTo>
-                  <a:pt x="11000" y="26000"/>
+                  <a:pt x="1199494" y="2915302"/>
+                </a:lnTo>
+                <a:lnTo>
+                  <a:pt x="1299952" y="2915302"/>
+                </a:lnTo>
+                <a:lnTo>
+                  <a:pt x="1949178" y="2540459"/>
+                </a:lnTo>
+                <a:lnTo>
+                  <a:pt x="1199494" y="2540459"/>
+                </a:lnTo>
+                <a:lnTo>
+                  <a:pt x="1199494" y="2165617"/>
+                </a:lnTo>
+                <a:lnTo>
+                  <a:pt x="824652" y="1949182"/>
                 </a:lnTo>
                 <a:close/>
               </a:path>
-              <a:path w="41660" h="54887">
+              <a:path w="3123184" h="4114800">
                 <a:moveTo>
-                  <a:pt x="6000" y="21774"/>
+                  <a:pt x="449810" y="1632365"/>
                 </a:moveTo>
                 <a:lnTo>
-                  <a:pt x="1000" y="18887"/>
-                </a:lnTo>
-                <a:lnTo>
-                  <a:pt x="1000" y="43887"/>
-                </a:lnTo>
-                <a:lnTo>
-                  <a:pt x="1000" y="48887"/>
-                </a:lnTo>
-                <a:lnTo>
-                  <a:pt x="1000" y="53887"/>
-                </a:lnTo>
-                <a:lnTo>
-                  <a:pt x="18113" y="53887"/>
-                </a:lnTo>
-                <a:lnTo>
-                  <a:pt x="21000" y="48887"/>
-                </a:lnTo>
-                <a:lnTo>
-                  <a:pt x="6000" y="48887"/>
-                </a:lnTo>
-                <a:lnTo>
-                  <a:pt x="6000" y="43887"/>
+                  <a:pt x="74968" y="1415931"/>
+                </a:lnTo>
+                <a:lnTo>
+                  <a:pt x="74968" y="3290145"/>
+                </a:lnTo>
+                <a:lnTo>
+                  <a:pt x="74968" y="3664988"/>
+                </a:lnTo>
+                <a:lnTo>
+                  <a:pt x="74968" y="4039831"/>
+                </a:lnTo>
+                <a:lnTo>
+                  <a:pt x="1357902" y="4039831"/>
+                </a:lnTo>
+                <a:lnTo>
+                  <a:pt x="1574336" y="3664988"/>
+                </a:lnTo>
+                <a:lnTo>
+                  <a:pt x="449810" y="3664988"/>
+                </a:lnTo>
+                <a:lnTo>
+                  <a:pt x="449810" y="3290145"/>
                 </a:lnTo>
                 <a:close/>
               </a:path>
-              <a:path w="41660" h="54887">
+              <a:path w="3123184" h="4114800">
                 <a:moveTo>
-                  <a:pt x="23113" y="53887"/>
+                  <a:pt x="1732744" y="4039831"/>
                 </a:moveTo>
                 <a:lnTo>
-                  <a:pt x="26000" y="48887"/>
-                </a:lnTo>
-                <a:lnTo>
-                  <a:pt x="23000" y="48887"/>
-                </a:lnTo>
-                <a:lnTo>
-                  <a:pt x="20113" y="53887"/>
+                  <a:pt x="1949178" y="3664988"/>
+                </a:lnTo>
+                <a:lnTo>
+                  <a:pt x="1724273" y="3664988"/>
+                </a:lnTo>
+                <a:lnTo>
+                  <a:pt x="1507839" y="4039831"/>
                 </a:lnTo>
                 <a:close/>
               </a:path>
@@ -1172,129 +1172,129 @@
             <a:cxnLst/>
             <a:rect l="0" t="0" r="r" b="b"/>
             <a:pathLst>
-              <a:path w="41660" h="54887">
+              <a:path w="3123184" h="4114800">
                 <a:moveTo>
-                  <a:pt x="1000" y="3887"/>
+                  <a:pt x="74968" y="291402"/>
                 </a:moveTo>
                 <a:lnTo>
-                  <a:pt x="1000" y="13887"/>
-                </a:lnTo>
-                <a:lnTo>
-                  <a:pt x="6000" y="16774"/>
-                </a:lnTo>
-                <a:lnTo>
-                  <a:pt x="6000" y="13887"/>
-                </a:lnTo>
-                <a:lnTo>
-                  <a:pt x="6000" y="8887"/>
-                </a:lnTo>
-                <a:lnTo>
-                  <a:pt x="23321" y="18887"/>
-                </a:lnTo>
-                <a:lnTo>
-                  <a:pt x="14660" y="23887"/>
-                </a:lnTo>
-                <a:lnTo>
-                  <a:pt x="15000" y="23887"/>
-                </a:lnTo>
-                <a:lnTo>
-                  <a:pt x="32320" y="33887"/>
-                </a:lnTo>
-                <a:lnTo>
-                  <a:pt x="23660" y="38887"/>
-                </a:lnTo>
-                <a:lnTo>
-                  <a:pt x="32000" y="38887"/>
-                </a:lnTo>
-                <a:lnTo>
-                  <a:pt x="40660" y="33887"/>
-                </a:lnTo>
-                <a:lnTo>
-                  <a:pt x="23340" y="23887"/>
-                </a:lnTo>
-                <a:lnTo>
-                  <a:pt x="32000" y="18887"/>
-                </a:lnTo>
-                <a:lnTo>
-                  <a:pt x="31981" y="18887"/>
-                </a:lnTo>
-                <a:lnTo>
-                  <a:pt x="14660" y="8887"/>
-                </a:lnTo>
-                <a:lnTo>
-                  <a:pt x="6000" y="3887"/>
-                </a:lnTo>
-                <a:lnTo>
-                  <a:pt x="1000" y="1000"/>
+                  <a:pt x="74968" y="1041088"/>
+                </a:lnTo>
+                <a:lnTo>
+                  <a:pt x="449810" y="1257522"/>
+                </a:lnTo>
+                <a:lnTo>
+                  <a:pt x="449810" y="1041088"/>
+                </a:lnTo>
+                <a:lnTo>
+                  <a:pt x="449810" y="666245"/>
+                </a:lnTo>
+                <a:lnTo>
+                  <a:pt x="1748338" y="1415931"/>
+                </a:lnTo>
+                <a:lnTo>
+                  <a:pt x="1099036" y="1790774"/>
+                </a:lnTo>
+                <a:lnTo>
+                  <a:pt x="1124526" y="1790774"/>
+                </a:lnTo>
+                <a:lnTo>
+                  <a:pt x="2423054" y="2540459"/>
+                </a:lnTo>
+                <a:lnTo>
+                  <a:pt x="1773752" y="2915302"/>
+                </a:lnTo>
+                <a:lnTo>
+                  <a:pt x="2398989" y="2915302"/>
+                </a:lnTo>
+                <a:lnTo>
+                  <a:pt x="3048215" y="2540459"/>
+                </a:lnTo>
+                <a:lnTo>
+                  <a:pt x="1749762" y="1790774"/>
+                </a:lnTo>
+                <a:lnTo>
+                  <a:pt x="2398989" y="1415931"/>
+                </a:lnTo>
+                <a:lnTo>
+                  <a:pt x="2397564" y="1415931"/>
+                </a:lnTo>
+                <a:lnTo>
+                  <a:pt x="1099036" y="666245"/>
+                </a:lnTo>
+                <a:lnTo>
+                  <a:pt x="449810" y="291402"/>
+                </a:lnTo>
+                <a:lnTo>
+                  <a:pt x="74968" y="74968"/>
                 </a:lnTo>
                 <a:close/>
               </a:path>
-              <a:path w="41660" h="54887">
+              <a:path w="3123184" h="4114800">
                 <a:moveTo>
-                  <a:pt x="11000" y="38887"/>
+                  <a:pt x="824652" y="2915302"/>
                 </a:moveTo>
                 <a:lnTo>
-                  <a:pt x="16000" y="38887"/>
-                </a:lnTo>
-                <a:lnTo>
-                  <a:pt x="17340" y="38887"/>
-                </a:lnTo>
-                <a:lnTo>
-                  <a:pt x="26000" y="33887"/>
-                </a:lnTo>
-                <a:lnTo>
-                  <a:pt x="16000" y="33887"/>
-                </a:lnTo>
-                <a:lnTo>
-                  <a:pt x="16000" y="28887"/>
-                </a:lnTo>
-                <a:lnTo>
-                  <a:pt x="11000" y="26000"/>
+                  <a:pt x="1199494" y="2915302"/>
+                </a:lnTo>
+                <a:lnTo>
+                  <a:pt x="1299952" y="2915302"/>
+                </a:lnTo>
+                <a:lnTo>
+                  <a:pt x="1949178" y="2540459"/>
+                </a:lnTo>
+                <a:lnTo>
+                  <a:pt x="1199494" y="2540459"/>
+                </a:lnTo>
+                <a:lnTo>
+                  <a:pt x="1199494" y="2165617"/>
+                </a:lnTo>
+                <a:lnTo>
+                  <a:pt x="824652" y="1949182"/>
                 </a:lnTo>
                 <a:close/>
               </a:path>
-              <a:path w="41660" h="54887">
+              <a:path w="3123184" h="4114800">
                 <a:moveTo>
-                  <a:pt x="6000" y="21774"/>
+                  <a:pt x="449810" y="1632365"/>
                 </a:moveTo>
                 <a:lnTo>
-                  <a:pt x="1000" y="18887"/>
-                </a:lnTo>
-                <a:lnTo>
-                  <a:pt x="1000" y="43887"/>
-                </a:lnTo>
-                <a:lnTo>
-                  <a:pt x="1000" y="48887"/>
-                </a:lnTo>
-                <a:lnTo>
-                  <a:pt x="1000" y="53887"/>
-                </a:lnTo>
-                <a:lnTo>
-                  <a:pt x="18113" y="53887"/>
-                </a:lnTo>
-                <a:lnTo>
-                  <a:pt x="21000" y="48887"/>
-                </a:lnTo>
-                <a:lnTo>
-                  <a:pt x="6000" y="48887"/>
-                </a:lnTo>
-                <a:lnTo>
-                  <a:pt x="6000" y="43887"/>
+                  <a:pt x="74968" y="1415931"/>
+                </a:lnTo>
+                <a:lnTo>
+                  <a:pt x="74968" y="3290145"/>
+                </a:lnTo>
+                <a:lnTo>
+                  <a:pt x="74968" y="3664988"/>
+                </a:lnTo>
+                <a:lnTo>
+                  <a:pt x="74968" y="4039831"/>
+                </a:lnTo>
+                <a:lnTo>
+                  <a:pt x="1357902" y="4039831"/>
+                </a:lnTo>
+                <a:lnTo>
+                  <a:pt x="1574336" y="3664988"/>
+                </a:lnTo>
+                <a:lnTo>
+                  <a:pt x="449810" y="3664988"/>
+                </a:lnTo>
+                <a:lnTo>
+                  <a:pt x="449810" y="3290145"/>
                 </a:lnTo>
                 <a:close/>
               </a:path>
-              <a:path w="41660" h="54887">
+              <a:path w="3123184" h="4114800">
                 <a:moveTo>
-                  <a:pt x="23113" y="53887"/>
+                  <a:pt x="1732744" y="4039831"/>
                 </a:moveTo>
                 <a:lnTo>
-                  <a:pt x="26000" y="48887"/>
-                </a:lnTo>
-                <a:lnTo>
-                  <a:pt x="23000" y="48887"/>
-                </a:lnTo>
-                <a:lnTo>
-                  <a:pt x="20113" y="53887"/>
+                  <a:pt x="1949178" y="3664988"/>
+                </a:lnTo>
+                <a:lnTo>
+                  <a:pt x="1724273" y="3664988"/>
+                </a:lnTo>
+                <a:lnTo>
+                  <a:pt x="1507839" y="4039831"/>
                 </a:lnTo>
                 <a:close/>
               </a:path>
@@ -1595,129 +1595,129 @@
             <a:cxnLst/>
             <a:rect l="0" t="0" r="r" b="b"/>
             <a:pathLst>
-              <a:path w="41660" h="54887">
+              <a:path w="3123184" h="4114800">
                 <a:moveTo>
-                  <a:pt x="1000" y="3887"/>
+                  <a:pt x="74968" y="291402"/>
                 </a:moveTo>
                 <a:lnTo>
-                  <a:pt x="1000" y="13887"/>
-                </a:lnTo>
-                <a:lnTo>
-                  <a:pt x="6000" y="16774"/>
-                </a:lnTo>
-                <a:lnTo>
-                  <a:pt x="6000" y="13887"/>
-                </a:lnTo>
-                <a:lnTo>
-                  <a:pt x="6000" y="8887"/>
-                </a:lnTo>
-                <a:lnTo>
-                  <a:pt x="23321" y="18887"/>
-                </a:lnTo>
-                <a:lnTo>
-                  <a:pt x="14660" y="23887"/>
-                </a:lnTo>
-                <a:lnTo>
-                  <a:pt x="15000" y="23887"/>
-                </a:lnTo>
-                <a:lnTo>
-                  <a:pt x="32320" y="33887"/>
-                </a:lnTo>
-                <a:lnTo>
-                  <a:pt x="23660" y="38887"/>
-                </a:lnTo>
-                <a:lnTo>
-                  <a:pt x="32000" y="38887"/>
-                </a:lnTo>
-                <a:lnTo>
-                  <a:pt x="40660" y="33887"/>
-                </a:lnTo>
-                <a:lnTo>
-                  <a:pt x="23340" y="23887"/>
-                </a:lnTo>
-                <a:lnTo>
-                  <a:pt x="32000" y="18887"/>
-                </a:lnTo>
-                <a:lnTo>
-                  <a:pt x="31981" y="18887"/>
-                </a:lnTo>
-                <a:lnTo>
-                  <a:pt x="14660" y="8887"/>
-                </a:lnTo>
-                <a:lnTo>
-                  <a:pt x="6000" y="3887"/>
-                </a:lnTo>
-                <a:lnTo>
-                  <a:pt x="1000" y="1000"/>
+                  <a:pt x="74968" y="1041088"/>
+                </a:lnTo>
+                <a:lnTo>
+                  <a:pt x="449810" y="1257522"/>
+                </a:lnTo>
+                <a:lnTo>
+                  <a:pt x="449810" y="1041088"/>
+                </a:lnTo>
+                <a:lnTo>
+                  <a:pt x="449810" y="666245"/>
+                </a:lnTo>
+                <a:lnTo>
+                  <a:pt x="1748338" y="1415931"/>
+                </a:lnTo>
+                <a:lnTo>
+                  <a:pt x="1099036" y="1790774"/>
+                </a:lnTo>
+                <a:lnTo>
+                  <a:pt x="1124526" y="1790774"/>
+                </a:lnTo>
+                <a:lnTo>
+                  <a:pt x="2423054" y="2540459"/>
+                </a:lnTo>
+                <a:lnTo>
+                  <a:pt x="1773752" y="2915302"/>
+                </a:lnTo>
+                <a:lnTo>
+                  <a:pt x="2398989" y="2915302"/>
+                </a:lnTo>
+                <a:lnTo>
+                  <a:pt x="3048215" y="2540459"/>
+                </a:lnTo>
+                <a:lnTo>
+                  <a:pt x="1749762" y="1790774"/>
+                </a:lnTo>
+                <a:lnTo>
+                  <a:pt x="2398989" y="1415931"/>
+                </a:lnTo>
+                <a:lnTo>
+                  <a:pt x="2397564" y="1415931"/>
+                </a:lnTo>
+                <a:lnTo>
+                  <a:pt x="1099036" y="666245"/>
+                </a:lnTo>
+                <a:lnTo>
+                  <a:pt x="449810" y="291402"/>
+                </a:lnTo>
+                <a:lnTo>
+                  <a:pt x="74968" y="74968"/>
                 </a:lnTo>
                 <a:close/>
               </a:path>
-              <a:path w="41660" h="54887">
+              <a:path w="3123184" h="4114800">
                 <a:moveTo>
-                  <a:pt x="11000" y="38887"/>
+                  <a:pt x="824652" y="2915302"/>
                 </a:moveTo>
                 <a:lnTo>
-                  <a:pt x="16000" y="38887"/>
-                </a:lnTo>
-                <a:lnTo>
-                  <a:pt x="17340" y="38887"/>
-                </a:lnTo>
-                <a:lnTo>
-                  <a:pt x="26000" y="33887"/>
-                </a:lnTo>
-                <a:lnTo>
-                  <a:pt x="16000" y="33887"/>
-                </a:lnTo>
-                <a:lnTo>
-                  <a:pt x="16000" y="28887"/>
-                </a:lnTo>
-                <a:lnTo>
-                  <a:pt x="11000" y="26000"/>
+                  <a:pt x="1199494" y="2915302"/>
+                </a:lnTo>
+                <a:lnTo>
+                  <a:pt x="1299952" y="2915302"/>
+                </a:lnTo>
+                <a:lnTo>
+                  <a:pt x="1949178" y="2540459"/>
+                </a:lnTo>
+                <a:lnTo>
+                  <a:pt x="1199494" y="2540459"/>
+                </a:lnTo>
+                <a:lnTo>
+                  <a:pt x="1199494" y="2165617"/>
+                </a:lnTo>
+                <a:lnTo>
+                  <a:pt x="824652" y="1949182"/>
                 </a:lnTo>
                 <a:close/>
               </a:path>
-              <a:path w="41660" h="54887">
+              <a:path w="3123184" h="4114800">
                 <a:moveTo>
-                  <a:pt x="6000" y="21774"/>
+                  <a:pt x="449810" y="1632365"/>
                 </a:moveTo>
                 <a:lnTo>
-                  <a:pt x="1000" y="18887"/>
-                </a:lnTo>
-                <a:lnTo>
-                  <a:pt x="1000" y="43887"/>
-                </a:lnTo>
-                <a:lnTo>
-                  <a:pt x="1000" y="48887"/>
-                </a:lnTo>
-                <a:lnTo>
-                  <a:pt x="1000" y="53887"/>
-                </a:lnTo>
-                <a:lnTo>
-                  <a:pt x="18113" y="53887"/>
-                </a:lnTo>
-                <a:lnTo>
-                  <a:pt x="21000" y="48887"/>
-                </a:lnTo>
-                <a:lnTo>
-                  <a:pt x="6000" y="48887"/>
-                </a:lnTo>
-                <a:lnTo>
-                  <a:pt x="6000" y="43887"/>
+                  <a:pt x="74968" y="1415931"/>
+                </a:lnTo>
+                <a:lnTo>
+                  <a:pt x="74968" y="3290145"/>
+                </a:lnTo>
+                <a:lnTo>
+                  <a:pt x="74968" y="3664988"/>
+                </a:lnTo>
+                <a:lnTo>
+                  <a:pt x="74968" y="4039831"/>
+                </a:lnTo>
+                <a:lnTo>
+                  <a:pt x="1357902" y="4039831"/>
+                </a:lnTo>
+                <a:lnTo>
+                  <a:pt x="1574336" y="3664988"/>
+                </a:lnTo>
+                <a:lnTo>
+                  <a:pt x="449810" y="3664988"/>
+                </a:lnTo>
+                <a:lnTo>
+                  <a:pt x="449810" y="3290145"/>
                 </a:lnTo>
                 <a:close/>
               </a:path>
-              <a:path w="41660" h="54887">
+              <a:path w="3123184" h="4114800">
                 <a:moveTo>
-                  <a:pt x="23113" y="53887"/>
+                  <a:pt x="1732744" y="4039831"/>
                 </a:moveTo>
                 <a:lnTo>
-                  <a:pt x="26000" y="48887"/>
-                </a:lnTo>
-                <a:lnTo>
-                  <a:pt x="23000" y="48887"/>
-                </a:lnTo>
-                <a:lnTo>
-                  <a:pt x="20113" y="53887"/>
+                  <a:pt x="1949178" y="3664988"/>
+                </a:lnTo>
+                <a:lnTo>
+                  <a:pt x="1724273" y="3664988"/>
+                </a:lnTo>
+                <a:lnTo>
+                  <a:pt x="1507839" y="4039831"/>
                 </a:lnTo>
                 <a:close/>
               </a:path>
@@ -1938,129 +1938,129 @@
             <a:cxnLst/>
             <a:rect l="0" t="0" r="r" b="b"/>
             <a:pathLst>
-              <a:path w="41660" h="54887">
+              <a:path w="3123184" h="4114800">
                 <a:moveTo>
-                  <a:pt x="1000" y="3887"/>
+                  <a:pt x="74968" y="291402"/>
                 </a:moveTo>
                 <a:lnTo>
-                  <a:pt x="1000" y="13887"/>
-                </a:lnTo>
-                <a:lnTo>
-                  <a:pt x="6000" y="16774"/>
-                </a:lnTo>
-                <a:lnTo>
-                  <a:pt x="6000" y="13887"/>
-                </a:lnTo>
-                <a:lnTo>
-                  <a:pt x="6000" y="8887"/>
-                </a:lnTo>
-                <a:lnTo>
-                  <a:pt x="23321" y="18887"/>
-                </a:lnTo>
-                <a:lnTo>
-                  <a:pt x="14660" y="23887"/>
-                </a:lnTo>
-                <a:lnTo>
-                  <a:pt x="15000" y="23887"/>
-                </a:lnTo>
-                <a:lnTo>
-                  <a:pt x="32320" y="33887"/>
-                </a:lnTo>
-                <a:lnTo>
-                  <a:pt x="23660" y="38887"/>
-                </a:lnTo>
-                <a:lnTo>
-                  <a:pt x="32000" y="38887"/>
-                </a:lnTo>
-                <a:lnTo>
-                  <a:pt x="40660" y="33887"/>
-                </a:lnTo>
-                <a:lnTo>
-                  <a:pt x="23340" y="23887"/>
-                </a:lnTo>
-                <a:lnTo>
-                  <a:pt x="32000" y="18887"/>
-                </a:lnTo>
-                <a:lnTo>
-                  <a:pt x="31981" y="18887"/>
-                </a:lnTo>
-                <a:lnTo>
-                  <a:pt x="14660" y="8887"/>
-                </a:lnTo>
-                <a:lnTo>
-                  <a:pt x="6000" y="3887"/>
-                </a:lnTo>
-                <a:lnTo>
-                  <a:pt x="1000" y="1000"/>
+                  <a:pt x="74968" y="1041088"/>
+                </a:lnTo>
+                <a:lnTo>
+                  <a:pt x="449810" y="1257522"/>
+                </a:lnTo>
+                <a:lnTo>
+                  <a:pt x="449810" y="1041088"/>
+                </a:lnTo>
+                <a:lnTo>
+                  <a:pt x="449810" y="666245"/>
+                </a:lnTo>
+                <a:lnTo>
+                  <a:pt x="1748338" y="1415931"/>
+                </a:lnTo>
+                <a:lnTo>
+                  <a:pt x="1099036" y="1790774"/>
+                </a:lnTo>
+                <a:lnTo>
+                  <a:pt x="1124526" y="1790774"/>
+                </a:lnTo>
+                <a:lnTo>
+                  <a:pt x="2423054" y="2540459"/>
+                </a:lnTo>
+                <a:lnTo>
+                  <a:pt x="1773752" y="2915302"/>
+                </a:lnTo>
+                <a:lnTo>
+                  <a:pt x="2398989" y="2915302"/>
+                </a:lnTo>
+                <a:lnTo>
+                  <a:pt x="3048215" y="2540459"/>
+                </a:lnTo>
+                <a:lnTo>
+                  <a:pt x="1749762" y="1790774"/>
+                </a:lnTo>
+                <a:lnTo>
+                  <a:pt x="2398989" y="1415931"/>
+                </a:lnTo>
+                <a:lnTo>
+                  <a:pt x="2397564" y="1415931"/>
+                </a:lnTo>
+                <a:lnTo>
+                  <a:pt x="1099036" y="666245"/>
+                </a:lnTo>
+                <a:lnTo>
+                  <a:pt x="449810" y="291402"/>
+                </a:lnTo>
+                <a:lnTo>
+                  <a:pt x="74968" y="74968"/>
                 </a:lnTo>
                 <a:close/>
               </a:path>
-              <a:path w="41660" h="54887">
+              <a:path w="3123184" h="4114800">
                 <a:moveTo>
-                  <a:pt x="11000" y="38887"/>
+                  <a:pt x="824652" y="2915302"/>
                 </a:moveTo>
                 <a:lnTo>
-                  <a:pt x="16000" y="38887"/>
-                </a:lnTo>
-                <a:lnTo>
-                  <a:pt x="17340" y="38887"/>
-                </a:lnTo>
-                <a:lnTo>
-                  <a:pt x="26000" y="33887"/>
-                </a:lnTo>
-                <a:lnTo>
-                  <a:pt x="16000" y="33887"/>
-                </a:lnTo>
-                <a:lnTo>
-                  <a:pt x="16000" y="28887"/>
-                </a:lnTo>
-                <a:lnTo>
-                  <a:pt x="11000" y="26000"/>
+                  <a:pt x="1199494" y="2915302"/>
+                </a:lnTo>
+                <a:lnTo>
+                  <a:pt x="1299952" y="2915302"/>
+                </a:lnTo>
+                <a:lnTo>
+                  <a:pt x="1949178" y="2540459"/>
+                </a:lnTo>
+                <a:lnTo>
+                  <a:pt x="1199494" y="2540459"/>
+                </a:lnTo>
+                <a:lnTo>
+                  <a:pt x="1199494" y="2165617"/>
+                </a:lnTo>
+                <a:lnTo>
+                  <a:pt x="824652" y="1949182"/>
                 </a:lnTo>
                 <a:close/>
               </a:path>
-              <a:path w="41660" h="54887">
+              <a:path w="3123184" h="4114800">
                 <a:moveTo>
-                  <a:pt x="6000" y="21774"/>
+                  <a:pt x="449810" y="1632365"/>
                 </a:moveTo>
                 <a:lnTo>
-                  <a:pt x="1000" y="18887"/>
-                </a:lnTo>
-                <a:lnTo>
-                  <a:pt x="1000" y="43887"/>
-                </a:lnTo>
-                <a:lnTo>
-                  <a:pt x="1000" y="48887"/>
-                </a:lnTo>
-                <a:lnTo>
-                  <a:pt x="1000" y="53887"/>
-                </a:lnTo>
-                <a:lnTo>
-                  <a:pt x="18113" y="53887"/>
-                </a:lnTo>
-                <a:lnTo>
-                  <a:pt x="21000" y="48887"/>
-                </a:lnTo>
-                <a:lnTo>
-                  <a:pt x="6000" y="48887"/>
-                </a:lnTo>
-                <a:lnTo>
-                  <a:pt x="6000" y="43887"/>
+                  <a:pt x="74968" y="1415931"/>
+                </a:lnTo>
+                <a:lnTo>
+                  <a:pt x="74968" y="3290145"/>
+                </a:lnTo>
+                <a:lnTo>
+                  <a:pt x="74968" y="3664988"/>
+                </a:lnTo>
+                <a:lnTo>
+                  <a:pt x="74968" y="4039831"/>
+                </a:lnTo>
+                <a:lnTo>
+                  <a:pt x="1357902" y="4039831"/>
+                </a:lnTo>
+                <a:lnTo>
+                  <a:pt x="1574336" y="3664988"/>
+                </a:lnTo>
+                <a:lnTo>
+                  <a:pt x="449810" y="3664988"/>
+                </a:lnTo>
+                <a:lnTo>
+                  <a:pt x="449810" y="3290145"/>
                 </a:lnTo>
                 <a:close/>
               </a:path>
-              <a:path w="41660" h="54887">
+              <a:path w="3123184" h="4114800">
                 <a:moveTo>
-                  <a:pt x="23113" y="53887"/>
+                  <a:pt x="1732744" y="4039831"/>
                 </a:moveTo>
                 <a:lnTo>
-                  <a:pt x="26000" y="48887"/>
-                </a:lnTo>
-                <a:lnTo>
-                  <a:pt x="23000" y="48887"/>
-                </a:lnTo>
-                <a:lnTo>
-                  <a:pt x="20113" y="53887"/>
+                  <a:pt x="1949178" y="3664988"/>
+                </a:lnTo>
+                <a:lnTo>
+                  <a:pt x="1724273" y="3664988"/>
+                </a:lnTo>
+                <a:lnTo>
+                  <a:pt x="1507839" y="4039831"/>
                 </a:lnTo>
                 <a:close/>
               </a:path>
@@ -2431,129 +2431,129 @@
             <a:cxnLst/>
             <a:rect l="0" t="0" r="r" b="b"/>
             <a:pathLst>
-              <a:path w="41660" h="54887">
+              <a:path w="192786" h="254000">
                 <a:moveTo>
-                  <a:pt x="1000" y="3887"/>
+                  <a:pt x="4627" y="17987"/>
                 </a:moveTo>
                 <a:lnTo>
-                  <a:pt x="1000" y="13887"/>
-                </a:lnTo>
-                <a:lnTo>
-                  <a:pt x="6000" y="16774"/>
-                </a:lnTo>
-                <a:lnTo>
-                  <a:pt x="6000" y="13887"/>
-                </a:lnTo>
-                <a:lnTo>
-                  <a:pt x="6000" y="8887"/>
-                </a:lnTo>
-                <a:lnTo>
-                  <a:pt x="23321" y="18887"/>
-                </a:lnTo>
-                <a:lnTo>
-                  <a:pt x="14660" y="23887"/>
-                </a:lnTo>
-                <a:lnTo>
-                  <a:pt x="15000" y="23887"/>
-                </a:lnTo>
-                <a:lnTo>
-                  <a:pt x="32320" y="33887"/>
-                </a:lnTo>
-                <a:lnTo>
-                  <a:pt x="23660" y="38887"/>
-                </a:lnTo>
-                <a:lnTo>
-                  <a:pt x="32000" y="38887"/>
-                </a:lnTo>
-                <a:lnTo>
-                  <a:pt x="40660" y="33887"/>
-                </a:lnTo>
-                <a:lnTo>
-                  <a:pt x="23340" y="23887"/>
-                </a:lnTo>
-                <a:lnTo>
-                  <a:pt x="32000" y="18887"/>
-                </a:lnTo>
-                <a:lnTo>
-                  <a:pt x="31981" y="18887"/>
-                </a:lnTo>
-                <a:lnTo>
-                  <a:pt x="14660" y="8887"/>
-                </a:lnTo>
-                <a:lnTo>
-                  <a:pt x="6000" y="3887"/>
-                </a:lnTo>
-                <a:lnTo>
-                  <a:pt x="1000" y="1000"/>
+                  <a:pt x="4627" y="64264"/>
+                </a:lnTo>
+                <a:lnTo>
+                  <a:pt x="27765" y="77624"/>
+                </a:lnTo>
+                <a:lnTo>
+                  <a:pt x="27765" y="64264"/>
+                </a:lnTo>
+                <a:lnTo>
+                  <a:pt x="27765" y="41126"/>
+                </a:lnTo>
+                <a:lnTo>
+                  <a:pt x="107920" y="87403"/>
+                </a:lnTo>
+                <a:lnTo>
+                  <a:pt x="67840" y="110541"/>
+                </a:lnTo>
+                <a:lnTo>
+                  <a:pt x="69414" y="110541"/>
+                </a:lnTo>
+                <a:lnTo>
+                  <a:pt x="149568" y="156818"/>
+                </a:lnTo>
+                <a:lnTo>
+                  <a:pt x="109489" y="179956"/>
+                </a:lnTo>
+                <a:lnTo>
+                  <a:pt x="148083" y="179956"/>
+                </a:lnTo>
+                <a:lnTo>
+                  <a:pt x="188158" y="156818"/>
+                </a:lnTo>
+                <a:lnTo>
+                  <a:pt x="108008" y="110541"/>
+                </a:lnTo>
+                <a:lnTo>
+                  <a:pt x="148083" y="87403"/>
+                </a:lnTo>
+                <a:lnTo>
+                  <a:pt x="147995" y="87403"/>
+                </a:lnTo>
+                <a:lnTo>
+                  <a:pt x="67840" y="41126"/>
+                </a:lnTo>
+                <a:lnTo>
+                  <a:pt x="27765" y="17987"/>
+                </a:lnTo>
+                <a:lnTo>
+                  <a:pt x="4627" y="4627"/>
                 </a:lnTo>
                 <a:close/>
               </a:path>
-              <a:path w="41660" h="54887">
+              <a:path w="192786" h="254000">
                 <a:moveTo>
-                  <a:pt x="11000" y="38887"/>
+                  <a:pt x="50903" y="179956"/>
                 </a:moveTo>
                 <a:lnTo>
-                  <a:pt x="16000" y="38887"/>
-                </a:lnTo>
-                <a:lnTo>
-                  <a:pt x="17340" y="38887"/>
-                </a:lnTo>
-                <a:lnTo>
-                  <a:pt x="26000" y="33887"/>
-                </a:lnTo>
-                <a:lnTo>
-                  <a:pt x="16000" y="33887"/>
-                </a:lnTo>
-                <a:lnTo>
-                  <a:pt x="16000" y="28887"/>
-                </a:lnTo>
-                <a:lnTo>
-                  <a:pt x="11000" y="26000"/>
+                  <a:pt x="74041" y="179956"/>
+                </a:lnTo>
+                <a:lnTo>
+                  <a:pt x="80242" y="179956"/>
+                </a:lnTo>
+                <a:lnTo>
+                  <a:pt x="120317" y="156818"/>
+                </a:lnTo>
+                <a:lnTo>
+                  <a:pt x="74041" y="156818"/>
+                </a:lnTo>
+                <a:lnTo>
+                  <a:pt x="74041" y="133680"/>
+                </a:lnTo>
+                <a:lnTo>
+                  <a:pt x="50903" y="120319"/>
                 </a:lnTo>
                 <a:close/>
               </a:path>
-              <a:path w="41660" h="54887">
+              <a:path w="192786" h="254000">
                 <a:moveTo>
-                  <a:pt x="6000" y="21774"/>
+                  <a:pt x="27765" y="100763"/>
                 </a:moveTo>
                 <a:lnTo>
-                  <a:pt x="1000" y="18887"/>
-                </a:lnTo>
-                <a:lnTo>
-                  <a:pt x="1000" y="43887"/>
-                </a:lnTo>
-                <a:lnTo>
-                  <a:pt x="1000" y="48887"/>
-                </a:lnTo>
-                <a:lnTo>
-                  <a:pt x="1000" y="53887"/>
-                </a:lnTo>
-                <a:lnTo>
-                  <a:pt x="18113" y="53887"/>
-                </a:lnTo>
-                <a:lnTo>
-                  <a:pt x="21000" y="48887"/>
-                </a:lnTo>
-                <a:lnTo>
-                  <a:pt x="6000" y="48887"/>
-                </a:lnTo>
-                <a:lnTo>
-                  <a:pt x="6000" y="43887"/>
+                  <a:pt x="4627" y="87403"/>
+                </a:lnTo>
+                <a:lnTo>
+                  <a:pt x="4627" y="203095"/>
+                </a:lnTo>
+                <a:lnTo>
+                  <a:pt x="4627" y="226233"/>
+                </a:lnTo>
+                <a:lnTo>
+                  <a:pt x="4627" y="249372"/>
+                </a:lnTo>
+                <a:lnTo>
+                  <a:pt x="83819" y="249372"/>
+                </a:lnTo>
+                <a:lnTo>
+                  <a:pt x="97179" y="226233"/>
+                </a:lnTo>
+                <a:lnTo>
+                  <a:pt x="27765" y="226233"/>
+                </a:lnTo>
+                <a:lnTo>
+                  <a:pt x="27765" y="203095"/>
                 </a:lnTo>
                 <a:close/>
               </a:path>
-              <a:path w="41660" h="54887">
+              <a:path w="192786" h="254000">
                 <a:moveTo>
-                  <a:pt x="23113" y="53887"/>
+                  <a:pt x="106957" y="249372"/>
                 </a:moveTo>
                 <a:lnTo>
-                  <a:pt x="26000" y="48887"/>
-                </a:lnTo>
-                <a:lnTo>
-                  <a:pt x="23000" y="48887"/>
-                </a:lnTo>
-                <a:lnTo>
-                  <a:pt x="20113" y="53887"/>
+                  <a:pt x="120317" y="226233"/>
+                </a:lnTo>
+                <a:lnTo>
+                  <a:pt x="106434" y="226233"/>
+                </a:lnTo>
+                <a:lnTo>
+                  <a:pt x="93075" y="249372"/>
                 </a:lnTo>
                 <a:close/>
               </a:path>
@@ -2845,129 +2845,129 @@
             <a:cxnLst/>
             <a:rect l="0" t="0" r="r" b="b"/>
             <a:pathLst>
-              <a:path w="41660" h="54887">
+              <a:path w="192786" h="254000">
                 <a:moveTo>
-                  <a:pt x="1000" y="3887"/>
+                  <a:pt x="4627" y="17987"/>
                 </a:moveTo>
                 <a:lnTo>
-                  <a:pt x="1000" y="13887"/>
-                </a:lnTo>
-                <a:lnTo>
-                  <a:pt x="6000" y="16774"/>
-                </a:lnTo>
-                <a:lnTo>
-                  <a:pt x="6000" y="13887"/>
-                </a:lnTo>
-                <a:lnTo>
-                  <a:pt x="6000" y="8887"/>
-                </a:lnTo>
-                <a:lnTo>
-                  <a:pt x="23321" y="18887"/>
-                </a:lnTo>
-                <a:lnTo>
-                  <a:pt x="14660" y="23887"/>
-                </a:lnTo>
-                <a:lnTo>
-                  <a:pt x="15000" y="23887"/>
-                </a:lnTo>
-                <a:lnTo>
-                  <a:pt x="32320" y="33887"/>
-                </a:lnTo>
-                <a:lnTo>
-                  <a:pt x="23660" y="38887"/>
-                </a:lnTo>
-                <a:lnTo>
-                  <a:pt x="32000" y="38887"/>
-                </a:lnTo>
-                <a:lnTo>
-                  <a:pt x="40660" y="33887"/>
-                </a:lnTo>
-                <a:lnTo>
-                  <a:pt x="23340" y="23887"/>
-                </a:lnTo>
-                <a:lnTo>
-                  <a:pt x="32000" y="18887"/>
-                </a:lnTo>
-                <a:lnTo>
-                  <a:pt x="31981" y="18887"/>
-                </a:lnTo>
-                <a:lnTo>
-                  <a:pt x="14660" y="8887"/>
-                </a:lnTo>
-                <a:lnTo>
-                  <a:pt x="6000" y="3887"/>
-                </a:lnTo>
-                <a:lnTo>
-                  <a:pt x="1000" y="1000"/>
+                  <a:pt x="4627" y="64264"/>
+                </a:lnTo>
+                <a:lnTo>
+                  <a:pt x="27765" y="77624"/>
+                </a:lnTo>
+                <a:lnTo>
+                  <a:pt x="27765" y="64264"/>
+                </a:lnTo>
+                <a:lnTo>
+                  <a:pt x="27765" y="41126"/>
+                </a:lnTo>
+                <a:lnTo>
+                  <a:pt x="107920" y="87403"/>
+                </a:lnTo>
+                <a:lnTo>
+                  <a:pt x="67840" y="110541"/>
+                </a:lnTo>
+                <a:lnTo>
+                  <a:pt x="69414" y="110541"/>
+                </a:lnTo>
+                <a:lnTo>
+                  <a:pt x="149568" y="156818"/>
+                </a:lnTo>
+                <a:lnTo>
+                  <a:pt x="109489" y="179956"/>
+                </a:lnTo>
+                <a:lnTo>
+                  <a:pt x="148083" y="179956"/>
+                </a:lnTo>
+                <a:lnTo>
+                  <a:pt x="188158" y="156818"/>
+                </a:lnTo>
+                <a:lnTo>
+                  <a:pt x="108008" y="110541"/>
+                </a:lnTo>
+                <a:lnTo>
+                  <a:pt x="148083" y="87403"/>
+                </a:lnTo>
+                <a:lnTo>
+                  <a:pt x="147995" y="87403"/>
+                </a:lnTo>
+                <a:lnTo>
+                  <a:pt x="67840" y="41126"/>
+                </a:lnTo>
+                <a:lnTo>
+                  <a:pt x="27765" y="17987"/>
+                </a:lnTo>
+                <a:lnTo>
+                  <a:pt x="4627" y="4627"/>
                 </a:lnTo>
                 <a:close/>
               </a:path>
-              <a:path w="41660" h="54887">
+              <a:path w="192786" h="254000">
                 <a:moveTo>
-                  <a:pt x="11000" y="38887"/>
+                  <a:pt x="50903" y="179956"/>
                 </a:moveTo>
                 <a:lnTo>
-                  <a:pt x="16000" y="38887"/>
-                </a:lnTo>
-                <a:lnTo>
-                  <a:pt x="17340" y="38887"/>
-                </a:lnTo>
-                <a:lnTo>
-                  <a:pt x="26000" y="33887"/>
-                </a:lnTo>
-                <a:lnTo>
-                  <a:pt x="16000" y="33887"/>
-                </a:lnTo>
-                <a:lnTo>
-                  <a:pt x="16000" y="28887"/>
-                </a:lnTo>
-                <a:lnTo>
-                  <a:pt x="11000" y="26000"/>
+                  <a:pt x="74041" y="179956"/>
+                </a:lnTo>
+                <a:lnTo>
+                  <a:pt x="80242" y="179956"/>
+                </a:lnTo>
+                <a:lnTo>
+                  <a:pt x="120317" y="156818"/>
+                </a:lnTo>
+                <a:lnTo>
+                  <a:pt x="74041" y="156818"/>
+                </a:lnTo>
+                <a:lnTo>
+                  <a:pt x="74041" y="133680"/>
+                </a:lnTo>
+                <a:lnTo>
+                  <a:pt x="50903" y="120319"/>
                 </a:lnTo>
                 <a:close/>
               </a:path>
-              <a:path w="41660" h="54887">
+              <a:path w="192786" h="254000">
                 <a:moveTo>
-                  <a:pt x="6000" y="21774"/>
+                  <a:pt x="27765" y="100763"/>
                 </a:moveTo>
                 <a:lnTo>
-                  <a:pt x="1000" y="18887"/>
-                </a:lnTo>
-                <a:lnTo>
-                  <a:pt x="1000" y="43887"/>
-                </a:lnTo>
-                <a:lnTo>
-                  <a:pt x="1000" y="48887"/>
-                </a:lnTo>
-                <a:lnTo>
-                  <a:pt x="1000" y="53887"/>
-                </a:lnTo>
-                <a:lnTo>
-                  <a:pt x="18113" y="53887"/>
-                </a:lnTo>
-                <a:lnTo>
-                  <a:pt x="21000" y="48887"/>
-                </a:lnTo>
-                <a:lnTo>
-                  <a:pt x="6000" y="48887"/>
-                </a:lnTo>
-                <a:lnTo>
-                  <a:pt x="6000" y="43887"/>
+                  <a:pt x="4627" y="87403"/>
+                </a:lnTo>
+                <a:lnTo>
+                  <a:pt x="4627" y="203095"/>
+                </a:lnTo>
+                <a:lnTo>
+                  <a:pt x="4627" y="226233"/>
+                </a:lnTo>
+                <a:lnTo>
+                  <a:pt x="4627" y="249372"/>
+                </a:lnTo>
+                <a:lnTo>
+                  <a:pt x="83819" y="249372"/>
+                </a:lnTo>
+                <a:lnTo>
+                  <a:pt x="97179" y="226233"/>
+                </a:lnTo>
+                <a:lnTo>
+                  <a:pt x="27765" y="226233"/>
+                </a:lnTo>
+                <a:lnTo>
+                  <a:pt x="27765" y="203095"/>
                 </a:lnTo>
                 <a:close/>
               </a:path>
-              <a:path w="41660" h="54887">
+              <a:path w="192786" h="254000">
                 <a:moveTo>
-                  <a:pt x="23113" y="53887"/>
+                  <a:pt x="106957" y="249372"/>
                 </a:moveTo>
                 <a:lnTo>
-                  <a:pt x="26000" y="48887"/>
-                </a:lnTo>
-                <a:lnTo>
-                  <a:pt x="23000" y="48887"/>
-                </a:lnTo>
-                <a:lnTo>
-                  <a:pt x="20113" y="53887"/>
+                  <a:pt x="120317" y="226233"/>
+                </a:lnTo>
+                <a:lnTo>
+                  <a:pt x="106434" y="226233"/>
+                </a:lnTo>
+                <a:lnTo>
+                  <a:pt x="93075" y="249372"/>
                 </a:lnTo>
                 <a:close/>
               </a:path>

--- a/bigtree/samples/bigtree_lab_sample.pptx
+++ b/bigtree/samples/bigtree_lab_sample.pptx
@@ -226,64 +226,62 @@
             <a:pathLst>
               <a:path w="347028" h="457200">
                 <a:moveTo>
-                  <a:pt x="8330" y="32378"/>
+                  <a:pt x="8333" y="32378"/>
                 </a:moveTo>
                 <a:lnTo>
-                  <a:pt x="8330" y="115676"/>
-                </a:lnTo>
-                <a:lnTo>
-                  <a:pt x="49980" y="139724"/>
-                </a:lnTo>
-                <a:lnTo>
-                  <a:pt x="49980" y="115676"/>
-                </a:lnTo>
-                <a:lnTo>
-                  <a:pt x="49980" y="74027"/>
-                </a:lnTo>
-                <a:lnTo>
-                  <a:pt x="194264" y="157325"/>
-                </a:lnTo>
-                <a:lnTo>
-                  <a:pt x="122117" y="198974"/>
-                </a:lnTo>
-                <a:lnTo>
-                  <a:pt x="124950" y="198974"/>
-                </a:lnTo>
-                <a:lnTo>
-                  <a:pt x="269234" y="282273"/>
+                  <a:pt x="8333" y="115676"/>
+                </a:lnTo>
+                <a:lnTo>
+                  <a:pt x="49982" y="139724"/>
+                </a:lnTo>
+                <a:lnTo>
+                  <a:pt x="49982" y="115676"/>
+                </a:lnTo>
+                <a:lnTo>
+                  <a:pt x="49982" y="74027"/>
+                </a:lnTo>
+                <a:lnTo>
+                  <a:pt x="194263" y="157325"/>
+                </a:lnTo>
+                <a:lnTo>
+                  <a:pt x="122118" y="198974"/>
+                </a:lnTo>
+                <a:lnTo>
+                  <a:pt x="124951" y="198974"/>
+                </a:lnTo>
+                <a:lnTo>
+                  <a:pt x="269232" y="282273"/>
                 </a:lnTo>
                 <a:lnTo>
                   <a:pt x="197087" y="323922"/>
                 </a:lnTo>
                 <a:lnTo>
-                  <a:pt x="266560" y="323922"/>
-                </a:lnTo>
-                <a:lnTo>
-                  <a:pt x="338697" y="282273"/>
-                </a:lnTo>
-                <a:lnTo>
-                  <a:pt x="194422" y="198974"/>
-                </a:lnTo>
-                <a:lnTo>
-                  <a:pt x="266560" y="157325"/>
-                </a:lnTo>
-                <a:lnTo>
-                  <a:pt x="266401" y="157325"/>
-                </a:lnTo>
-                <a:lnTo>
-                  <a:pt x="122117" y="74027"/>
-                </a:lnTo>
-                <a:lnTo>
-                  <a:pt x="49980" y="32378"/>
-                </a:lnTo>
-                <a:lnTo>
-                  <a:pt x="8330" y="8329"/>
+                  <a:pt x="266558" y="323922"/>
+                </a:lnTo>
+                <a:lnTo>
+                  <a:pt x="338694" y="282273"/>
+                </a:lnTo>
+                <a:lnTo>
+                  <a:pt x="194421" y="198974"/>
+                </a:lnTo>
+                <a:lnTo>
+                  <a:pt x="266558" y="157325"/>
+                </a:lnTo>
+                <a:lnTo>
+                  <a:pt x="266400" y="157325"/>
+                </a:lnTo>
+                <a:lnTo>
+                  <a:pt x="122118" y="74027"/>
+                </a:lnTo>
+                <a:lnTo>
+                  <a:pt x="49982" y="32378"/>
+                </a:lnTo>
+                <a:lnTo>
+                  <a:pt x="8333" y="8329"/>
                 </a:lnTo>
                 <a:close/>
-              </a:path>
-              <a:path w="347028" h="457200">
                 <a:moveTo>
-                  <a:pt x="91630" y="323922"/>
+                  <a:pt x="91631" y="323922"/>
                 </a:moveTo>
                 <a:lnTo>
                   <a:pt x="133280" y="323922"/>
@@ -292,7 +290,7 @@
                   <a:pt x="144442" y="323922"/>
                 </a:lnTo>
                 <a:lnTo>
-                  <a:pt x="216580" y="282273"/>
+                  <a:pt x="216579" y="282273"/>
                 </a:lnTo>
                 <a:lnTo>
                   <a:pt x="133280" y="282273"/>
@@ -301,25 +299,23 @@
                   <a:pt x="133280" y="240624"/>
                 </a:lnTo>
                 <a:lnTo>
-                  <a:pt x="91630" y="216575"/>
+                  <a:pt x="91631" y="216575"/>
                 </a:lnTo>
                 <a:close/>
-              </a:path>
-              <a:path w="347028" h="457200">
                 <a:moveTo>
-                  <a:pt x="49980" y="181373"/>
+                  <a:pt x="49982" y="181373"/>
                 </a:moveTo>
                 <a:lnTo>
-                  <a:pt x="8330" y="157325"/>
-                </a:lnTo>
-                <a:lnTo>
-                  <a:pt x="8330" y="365571"/>
-                </a:lnTo>
-                <a:lnTo>
-                  <a:pt x="8330" y="407220"/>
-                </a:lnTo>
-                <a:lnTo>
-                  <a:pt x="8330" y="448870"/>
+                  <a:pt x="8333" y="157325"/>
+                </a:lnTo>
+                <a:lnTo>
+                  <a:pt x="8333" y="365571"/>
+                </a:lnTo>
+                <a:lnTo>
+                  <a:pt x="8333" y="407220"/>
+                </a:lnTo>
+                <a:lnTo>
+                  <a:pt x="8333" y="448870"/>
                 </a:lnTo>
                 <a:lnTo>
                   <a:pt x="150881" y="448870"/>
@@ -328,22 +324,20 @@
                   <a:pt x="174930" y="407220"/>
                 </a:lnTo>
                 <a:lnTo>
-                  <a:pt x="49980" y="407220"/>
-                </a:lnTo>
-                <a:lnTo>
-                  <a:pt x="49980" y="365571"/>
+                  <a:pt x="49982" y="407220"/>
+                </a:lnTo>
+                <a:lnTo>
+                  <a:pt x="49982" y="365571"/>
                 </a:lnTo>
                 <a:close/>
-              </a:path>
-              <a:path w="347028" h="457200">
                 <a:moveTo>
                   <a:pt x="192531" y="448870"/>
                 </a:moveTo>
                 <a:lnTo>
-                  <a:pt x="216580" y="407220"/>
-                </a:lnTo>
-                <a:lnTo>
-                  <a:pt x="191590" y="407220"/>
+                  <a:pt x="216579" y="407220"/>
+                </a:lnTo>
+                <a:lnTo>
+                  <a:pt x="191589" y="407220"/>
                 </a:lnTo>
                 <a:lnTo>
                   <a:pt x="167541" y="448870"/>
@@ -751,22 +745,22 @@
             <a:pathLst>
               <a:path w="3123184" h="4114800">
                 <a:moveTo>
-                  <a:pt x="74968" y="291402"/>
+                  <a:pt x="74968" y="291406"/>
                 </a:moveTo>
                 <a:lnTo>
-                  <a:pt x="74968" y="1041088"/>
-                </a:lnTo>
-                <a:lnTo>
-                  <a:pt x="449810" y="1257522"/>
-                </a:lnTo>
-                <a:lnTo>
-                  <a:pt x="449810" y="1041088"/>
-                </a:lnTo>
-                <a:lnTo>
-                  <a:pt x="449810" y="666245"/>
-                </a:lnTo>
-                <a:lnTo>
-                  <a:pt x="1748338" y="1415931"/>
+                  <a:pt x="74968" y="1041090"/>
+                </a:lnTo>
+                <a:lnTo>
+                  <a:pt x="449810" y="1257524"/>
+                </a:lnTo>
+                <a:lnTo>
+                  <a:pt x="449810" y="1041090"/>
+                </a:lnTo>
+                <a:lnTo>
+                  <a:pt x="449810" y="666248"/>
+                </a:lnTo>
+                <a:lnTo>
+                  <a:pt x="1748338" y="1415932"/>
                 </a:lnTo>
                 <a:lnTo>
                   <a:pt x="1099036" y="1790774"/>
@@ -775,103 +769,97 @@
                   <a:pt x="1124526" y="1790774"/>
                 </a:lnTo>
                 <a:lnTo>
-                  <a:pt x="2423054" y="2540459"/>
-                </a:lnTo>
-                <a:lnTo>
-                  <a:pt x="1773752" y="2915302"/>
-                </a:lnTo>
-                <a:lnTo>
-                  <a:pt x="2398989" y="2915302"/>
-                </a:lnTo>
-                <a:lnTo>
-                  <a:pt x="3048215" y="2540459"/>
+                  <a:pt x="2423054" y="2540458"/>
+                </a:lnTo>
+                <a:lnTo>
+                  <a:pt x="1773752" y="2915301"/>
+                </a:lnTo>
+                <a:lnTo>
+                  <a:pt x="2398989" y="2915301"/>
+                </a:lnTo>
+                <a:lnTo>
+                  <a:pt x="3048215" y="2540458"/>
                 </a:lnTo>
                 <a:lnTo>
                   <a:pt x="1749762" y="1790774"/>
                 </a:lnTo>
                 <a:lnTo>
-                  <a:pt x="2398989" y="1415931"/>
-                </a:lnTo>
-                <a:lnTo>
-                  <a:pt x="2397564" y="1415931"/>
-                </a:lnTo>
-                <a:lnTo>
-                  <a:pt x="1099036" y="666245"/>
-                </a:lnTo>
-                <a:lnTo>
-                  <a:pt x="449810" y="291402"/>
-                </a:lnTo>
-                <a:lnTo>
-                  <a:pt x="74968" y="74968"/>
+                  <a:pt x="2398989" y="1415932"/>
+                </a:lnTo>
+                <a:lnTo>
+                  <a:pt x="2397564" y="1415932"/>
+                </a:lnTo>
+                <a:lnTo>
+                  <a:pt x="1099036" y="666248"/>
+                </a:lnTo>
+                <a:lnTo>
+                  <a:pt x="449810" y="291406"/>
+                </a:lnTo>
+                <a:lnTo>
+                  <a:pt x="74968" y="74972"/>
                 </a:lnTo>
                 <a:close/>
-              </a:path>
-              <a:path w="3123184" h="4114800">
                 <a:moveTo>
-                  <a:pt x="824652" y="2915302"/>
+                  <a:pt x="824652" y="2915301"/>
                 </a:moveTo>
                 <a:lnTo>
-                  <a:pt x="1199494" y="2915302"/>
-                </a:lnTo>
-                <a:lnTo>
-                  <a:pt x="1299952" y="2915302"/>
-                </a:lnTo>
-                <a:lnTo>
-                  <a:pt x="1949178" y="2540459"/>
-                </a:lnTo>
-                <a:lnTo>
-                  <a:pt x="1199494" y="2540459"/>
-                </a:lnTo>
-                <a:lnTo>
-                  <a:pt x="1199494" y="2165617"/>
-                </a:lnTo>
-                <a:lnTo>
-                  <a:pt x="824652" y="1949182"/>
+                  <a:pt x="1199494" y="2915301"/>
+                </a:lnTo>
+                <a:lnTo>
+                  <a:pt x="1299952" y="2915301"/>
+                </a:lnTo>
+                <a:lnTo>
+                  <a:pt x="1949178" y="2540458"/>
+                </a:lnTo>
+                <a:lnTo>
+                  <a:pt x="1199494" y="2540458"/>
+                </a:lnTo>
+                <a:lnTo>
+                  <a:pt x="1199494" y="2165616"/>
+                </a:lnTo>
+                <a:lnTo>
+                  <a:pt x="824652" y="1949183"/>
                 </a:lnTo>
                 <a:close/>
-              </a:path>
-              <a:path w="3123184" h="4114800">
                 <a:moveTo>
-                  <a:pt x="449810" y="1632365"/>
+                  <a:pt x="449810" y="1632366"/>
                 </a:moveTo>
                 <a:lnTo>
-                  <a:pt x="74968" y="1415931"/>
-                </a:lnTo>
-                <a:lnTo>
-                  <a:pt x="74968" y="3290145"/>
-                </a:lnTo>
-                <a:lnTo>
-                  <a:pt x="74968" y="3664988"/>
-                </a:lnTo>
-                <a:lnTo>
-                  <a:pt x="74968" y="4039831"/>
-                </a:lnTo>
-                <a:lnTo>
-                  <a:pt x="1357902" y="4039831"/>
-                </a:lnTo>
-                <a:lnTo>
-                  <a:pt x="1574336" y="3664988"/>
-                </a:lnTo>
-                <a:lnTo>
-                  <a:pt x="449810" y="3664988"/>
-                </a:lnTo>
-                <a:lnTo>
-                  <a:pt x="449810" y="3290145"/>
+                  <a:pt x="74968" y="1415932"/>
+                </a:lnTo>
+                <a:lnTo>
+                  <a:pt x="74968" y="3290143"/>
+                </a:lnTo>
+                <a:lnTo>
+                  <a:pt x="74968" y="3664985"/>
+                </a:lnTo>
+                <a:lnTo>
+                  <a:pt x="74968" y="4039827"/>
+                </a:lnTo>
+                <a:lnTo>
+                  <a:pt x="1357902" y="4039827"/>
+                </a:lnTo>
+                <a:lnTo>
+                  <a:pt x="1574336" y="3664985"/>
+                </a:lnTo>
+                <a:lnTo>
+                  <a:pt x="449810" y="3664985"/>
+                </a:lnTo>
+                <a:lnTo>
+                  <a:pt x="449810" y="3290143"/>
                 </a:lnTo>
                 <a:close/>
-              </a:path>
-              <a:path w="3123184" h="4114800">
                 <a:moveTo>
-                  <a:pt x="1732744" y="4039831"/>
+                  <a:pt x="1732744" y="4039827"/>
                 </a:moveTo>
                 <a:lnTo>
-                  <a:pt x="1949178" y="3664988"/>
-                </a:lnTo>
-                <a:lnTo>
-                  <a:pt x="1724273" y="3664988"/>
-                </a:lnTo>
-                <a:lnTo>
-                  <a:pt x="1507839" y="4039831"/>
+                  <a:pt x="1949178" y="3664985"/>
+                </a:lnTo>
+                <a:lnTo>
+                  <a:pt x="1724273" y="3664985"/>
+                </a:lnTo>
+                <a:lnTo>
+                  <a:pt x="1507839" y="4039827"/>
                 </a:lnTo>
                 <a:close/>
               </a:path>
@@ -1174,22 +1162,22 @@
             <a:pathLst>
               <a:path w="3123184" h="4114800">
                 <a:moveTo>
-                  <a:pt x="74968" y="291402"/>
+                  <a:pt x="74968" y="291406"/>
                 </a:moveTo>
                 <a:lnTo>
-                  <a:pt x="74968" y="1041088"/>
-                </a:lnTo>
-                <a:lnTo>
-                  <a:pt x="449810" y="1257522"/>
-                </a:lnTo>
-                <a:lnTo>
-                  <a:pt x="449810" y="1041088"/>
-                </a:lnTo>
-                <a:lnTo>
-                  <a:pt x="449810" y="666245"/>
-                </a:lnTo>
-                <a:lnTo>
-                  <a:pt x="1748338" y="1415931"/>
+                  <a:pt x="74968" y="1041090"/>
+                </a:lnTo>
+                <a:lnTo>
+                  <a:pt x="449810" y="1257524"/>
+                </a:lnTo>
+                <a:lnTo>
+                  <a:pt x="449810" y="1041090"/>
+                </a:lnTo>
+                <a:lnTo>
+                  <a:pt x="449810" y="666248"/>
+                </a:lnTo>
+                <a:lnTo>
+                  <a:pt x="1748338" y="1415932"/>
                 </a:lnTo>
                 <a:lnTo>
                   <a:pt x="1099036" y="1790774"/>
@@ -1198,103 +1186,97 @@
                   <a:pt x="1124526" y="1790774"/>
                 </a:lnTo>
                 <a:lnTo>
-                  <a:pt x="2423054" y="2540459"/>
-                </a:lnTo>
-                <a:lnTo>
-                  <a:pt x="1773752" y="2915302"/>
-                </a:lnTo>
-                <a:lnTo>
-                  <a:pt x="2398989" y="2915302"/>
-                </a:lnTo>
-                <a:lnTo>
-                  <a:pt x="3048215" y="2540459"/>
+                  <a:pt x="2423054" y="2540458"/>
+                </a:lnTo>
+                <a:lnTo>
+                  <a:pt x="1773752" y="2915301"/>
+                </a:lnTo>
+                <a:lnTo>
+                  <a:pt x="2398989" y="2915301"/>
+                </a:lnTo>
+                <a:lnTo>
+                  <a:pt x="3048215" y="2540458"/>
                 </a:lnTo>
                 <a:lnTo>
                   <a:pt x="1749762" y="1790774"/>
                 </a:lnTo>
                 <a:lnTo>
-                  <a:pt x="2398989" y="1415931"/>
-                </a:lnTo>
-                <a:lnTo>
-                  <a:pt x="2397564" y="1415931"/>
-                </a:lnTo>
-                <a:lnTo>
-                  <a:pt x="1099036" y="666245"/>
-                </a:lnTo>
-                <a:lnTo>
-                  <a:pt x="449810" y="291402"/>
-                </a:lnTo>
-                <a:lnTo>
-                  <a:pt x="74968" y="74968"/>
+                  <a:pt x="2398989" y="1415932"/>
+                </a:lnTo>
+                <a:lnTo>
+                  <a:pt x="2397564" y="1415932"/>
+                </a:lnTo>
+                <a:lnTo>
+                  <a:pt x="1099036" y="666248"/>
+                </a:lnTo>
+                <a:lnTo>
+                  <a:pt x="449810" y="291406"/>
+                </a:lnTo>
+                <a:lnTo>
+                  <a:pt x="74968" y="74972"/>
                 </a:lnTo>
                 <a:close/>
-              </a:path>
-              <a:path w="3123184" h="4114800">
                 <a:moveTo>
-                  <a:pt x="824652" y="2915302"/>
+                  <a:pt x="824652" y="2915301"/>
                 </a:moveTo>
                 <a:lnTo>
-                  <a:pt x="1199494" y="2915302"/>
-                </a:lnTo>
-                <a:lnTo>
-                  <a:pt x="1299952" y="2915302"/>
-                </a:lnTo>
-                <a:lnTo>
-                  <a:pt x="1949178" y="2540459"/>
-                </a:lnTo>
-                <a:lnTo>
-                  <a:pt x="1199494" y="2540459"/>
-                </a:lnTo>
-                <a:lnTo>
-                  <a:pt x="1199494" y="2165617"/>
-                </a:lnTo>
-                <a:lnTo>
-                  <a:pt x="824652" y="1949182"/>
+                  <a:pt x="1199494" y="2915301"/>
+                </a:lnTo>
+                <a:lnTo>
+                  <a:pt x="1299952" y="2915301"/>
+                </a:lnTo>
+                <a:lnTo>
+                  <a:pt x="1949178" y="2540458"/>
+                </a:lnTo>
+                <a:lnTo>
+                  <a:pt x="1199494" y="2540458"/>
+                </a:lnTo>
+                <a:lnTo>
+                  <a:pt x="1199494" y="2165616"/>
+                </a:lnTo>
+                <a:lnTo>
+                  <a:pt x="824652" y="1949183"/>
                 </a:lnTo>
                 <a:close/>
-              </a:path>
-              <a:path w="3123184" h="4114800">
                 <a:moveTo>
-                  <a:pt x="449810" y="1632365"/>
+                  <a:pt x="449810" y="1632366"/>
                 </a:moveTo>
                 <a:lnTo>
-                  <a:pt x="74968" y="1415931"/>
-                </a:lnTo>
-                <a:lnTo>
-                  <a:pt x="74968" y="3290145"/>
-                </a:lnTo>
-                <a:lnTo>
-                  <a:pt x="74968" y="3664988"/>
-                </a:lnTo>
-                <a:lnTo>
-                  <a:pt x="74968" y="4039831"/>
-                </a:lnTo>
-                <a:lnTo>
-                  <a:pt x="1357902" y="4039831"/>
-                </a:lnTo>
-                <a:lnTo>
-                  <a:pt x="1574336" y="3664988"/>
-                </a:lnTo>
-                <a:lnTo>
-                  <a:pt x="449810" y="3664988"/>
-                </a:lnTo>
-                <a:lnTo>
-                  <a:pt x="449810" y="3290145"/>
+                  <a:pt x="74968" y="1415932"/>
+                </a:lnTo>
+                <a:lnTo>
+                  <a:pt x="74968" y="3290143"/>
+                </a:lnTo>
+                <a:lnTo>
+                  <a:pt x="74968" y="3664985"/>
+                </a:lnTo>
+                <a:lnTo>
+                  <a:pt x="74968" y="4039827"/>
+                </a:lnTo>
+                <a:lnTo>
+                  <a:pt x="1357902" y="4039827"/>
+                </a:lnTo>
+                <a:lnTo>
+                  <a:pt x="1574336" y="3664985"/>
+                </a:lnTo>
+                <a:lnTo>
+                  <a:pt x="449810" y="3664985"/>
+                </a:lnTo>
+                <a:lnTo>
+                  <a:pt x="449810" y="3290143"/>
                 </a:lnTo>
                 <a:close/>
-              </a:path>
-              <a:path w="3123184" h="4114800">
                 <a:moveTo>
-                  <a:pt x="1732744" y="4039831"/>
+                  <a:pt x="1732744" y="4039827"/>
                 </a:moveTo>
                 <a:lnTo>
-                  <a:pt x="1949178" y="3664988"/>
-                </a:lnTo>
-                <a:lnTo>
-                  <a:pt x="1724273" y="3664988"/>
-                </a:lnTo>
-                <a:lnTo>
-                  <a:pt x="1507839" y="4039831"/>
+                  <a:pt x="1949178" y="3664985"/>
+                </a:lnTo>
+                <a:lnTo>
+                  <a:pt x="1724273" y="3664985"/>
+                </a:lnTo>
+                <a:lnTo>
+                  <a:pt x="1507839" y="4039827"/>
                 </a:lnTo>
                 <a:close/>
               </a:path>
@@ -1597,22 +1579,22 @@
             <a:pathLst>
               <a:path w="3123184" h="4114800">
                 <a:moveTo>
-                  <a:pt x="74968" y="291402"/>
+                  <a:pt x="74968" y="291406"/>
                 </a:moveTo>
                 <a:lnTo>
-                  <a:pt x="74968" y="1041088"/>
-                </a:lnTo>
-                <a:lnTo>
-                  <a:pt x="449810" y="1257522"/>
-                </a:lnTo>
-                <a:lnTo>
-                  <a:pt x="449810" y="1041088"/>
-                </a:lnTo>
-                <a:lnTo>
-                  <a:pt x="449810" y="666245"/>
-                </a:lnTo>
-                <a:lnTo>
-                  <a:pt x="1748338" y="1415931"/>
+                  <a:pt x="74968" y="1041090"/>
+                </a:lnTo>
+                <a:lnTo>
+                  <a:pt x="449810" y="1257524"/>
+                </a:lnTo>
+                <a:lnTo>
+                  <a:pt x="449810" y="1041090"/>
+                </a:lnTo>
+                <a:lnTo>
+                  <a:pt x="449810" y="666248"/>
+                </a:lnTo>
+                <a:lnTo>
+                  <a:pt x="1748338" y="1415932"/>
                 </a:lnTo>
                 <a:lnTo>
                   <a:pt x="1099036" y="1790774"/>
@@ -1621,103 +1603,97 @@
                   <a:pt x="1124526" y="1790774"/>
                 </a:lnTo>
                 <a:lnTo>
-                  <a:pt x="2423054" y="2540459"/>
-                </a:lnTo>
-                <a:lnTo>
-                  <a:pt x="1773752" y="2915302"/>
-                </a:lnTo>
-                <a:lnTo>
-                  <a:pt x="2398989" y="2915302"/>
-                </a:lnTo>
-                <a:lnTo>
-                  <a:pt x="3048215" y="2540459"/>
+                  <a:pt x="2423054" y="2540458"/>
+                </a:lnTo>
+                <a:lnTo>
+                  <a:pt x="1773752" y="2915301"/>
+                </a:lnTo>
+                <a:lnTo>
+                  <a:pt x="2398989" y="2915301"/>
+                </a:lnTo>
+                <a:lnTo>
+                  <a:pt x="3048215" y="2540458"/>
                 </a:lnTo>
                 <a:lnTo>
                   <a:pt x="1749762" y="1790774"/>
                 </a:lnTo>
                 <a:lnTo>
-                  <a:pt x="2398989" y="1415931"/>
-                </a:lnTo>
-                <a:lnTo>
-                  <a:pt x="2397564" y="1415931"/>
-                </a:lnTo>
-                <a:lnTo>
-                  <a:pt x="1099036" y="666245"/>
-                </a:lnTo>
-                <a:lnTo>
-                  <a:pt x="449810" y="291402"/>
-                </a:lnTo>
-                <a:lnTo>
-                  <a:pt x="74968" y="74968"/>
+                  <a:pt x="2398989" y="1415932"/>
+                </a:lnTo>
+                <a:lnTo>
+                  <a:pt x="2397564" y="1415932"/>
+                </a:lnTo>
+                <a:lnTo>
+                  <a:pt x="1099036" y="666248"/>
+                </a:lnTo>
+                <a:lnTo>
+                  <a:pt x="449810" y="291406"/>
+                </a:lnTo>
+                <a:lnTo>
+                  <a:pt x="74968" y="74972"/>
                 </a:lnTo>
                 <a:close/>
-              </a:path>
-              <a:path w="3123184" h="4114800">
                 <a:moveTo>
-                  <a:pt x="824652" y="2915302"/>
+                  <a:pt x="824652" y="2915301"/>
                 </a:moveTo>
                 <a:lnTo>
-                  <a:pt x="1199494" y="2915302"/>
-                </a:lnTo>
-                <a:lnTo>
-                  <a:pt x="1299952" y="2915302"/>
-                </a:lnTo>
-                <a:lnTo>
-                  <a:pt x="1949178" y="2540459"/>
-                </a:lnTo>
-                <a:lnTo>
-                  <a:pt x="1199494" y="2540459"/>
-                </a:lnTo>
-                <a:lnTo>
-                  <a:pt x="1199494" y="2165617"/>
-                </a:lnTo>
-                <a:lnTo>
-                  <a:pt x="824652" y="1949182"/>
+                  <a:pt x="1199494" y="2915301"/>
+                </a:lnTo>
+                <a:lnTo>
+                  <a:pt x="1299952" y="2915301"/>
+                </a:lnTo>
+                <a:lnTo>
+                  <a:pt x="1949178" y="2540458"/>
+                </a:lnTo>
+                <a:lnTo>
+                  <a:pt x="1199494" y="2540458"/>
+                </a:lnTo>
+                <a:lnTo>
+                  <a:pt x="1199494" y="2165616"/>
+                </a:lnTo>
+                <a:lnTo>
+                  <a:pt x="824652" y="1949183"/>
                 </a:lnTo>
                 <a:close/>
-              </a:path>
-              <a:path w="3123184" h="4114800">
                 <a:moveTo>
-                  <a:pt x="449810" y="1632365"/>
+                  <a:pt x="449810" y="1632366"/>
                 </a:moveTo>
                 <a:lnTo>
-                  <a:pt x="74968" y="1415931"/>
-                </a:lnTo>
-                <a:lnTo>
-                  <a:pt x="74968" y="3290145"/>
-                </a:lnTo>
-                <a:lnTo>
-                  <a:pt x="74968" y="3664988"/>
-                </a:lnTo>
-                <a:lnTo>
-                  <a:pt x="74968" y="4039831"/>
-                </a:lnTo>
-                <a:lnTo>
-                  <a:pt x="1357902" y="4039831"/>
-                </a:lnTo>
-                <a:lnTo>
-                  <a:pt x="1574336" y="3664988"/>
-                </a:lnTo>
-                <a:lnTo>
-                  <a:pt x="449810" y="3664988"/>
-                </a:lnTo>
-                <a:lnTo>
-                  <a:pt x="449810" y="3290145"/>
+                  <a:pt x="74968" y="1415932"/>
+                </a:lnTo>
+                <a:lnTo>
+                  <a:pt x="74968" y="3290143"/>
+                </a:lnTo>
+                <a:lnTo>
+                  <a:pt x="74968" y="3664985"/>
+                </a:lnTo>
+                <a:lnTo>
+                  <a:pt x="74968" y="4039827"/>
+                </a:lnTo>
+                <a:lnTo>
+                  <a:pt x="1357902" y="4039827"/>
+                </a:lnTo>
+                <a:lnTo>
+                  <a:pt x="1574336" y="3664985"/>
+                </a:lnTo>
+                <a:lnTo>
+                  <a:pt x="449810" y="3664985"/>
+                </a:lnTo>
+                <a:lnTo>
+                  <a:pt x="449810" y="3290143"/>
                 </a:lnTo>
                 <a:close/>
-              </a:path>
-              <a:path w="3123184" h="4114800">
                 <a:moveTo>
-                  <a:pt x="1732744" y="4039831"/>
+                  <a:pt x="1732744" y="4039827"/>
                 </a:moveTo>
                 <a:lnTo>
-                  <a:pt x="1949178" y="3664988"/>
-                </a:lnTo>
-                <a:lnTo>
-                  <a:pt x="1724273" y="3664988"/>
-                </a:lnTo>
-                <a:lnTo>
-                  <a:pt x="1507839" y="4039831"/>
+                  <a:pt x="1949178" y="3664985"/>
+                </a:lnTo>
+                <a:lnTo>
+                  <a:pt x="1724273" y="3664985"/>
+                </a:lnTo>
+                <a:lnTo>
+                  <a:pt x="1507839" y="4039827"/>
                 </a:lnTo>
                 <a:close/>
               </a:path>
@@ -1940,22 +1916,22 @@
             <a:pathLst>
               <a:path w="3123184" h="4114800">
                 <a:moveTo>
-                  <a:pt x="74968" y="291402"/>
+                  <a:pt x="74968" y="291406"/>
                 </a:moveTo>
                 <a:lnTo>
-                  <a:pt x="74968" y="1041088"/>
-                </a:lnTo>
-                <a:lnTo>
-                  <a:pt x="449810" y="1257522"/>
-                </a:lnTo>
-                <a:lnTo>
-                  <a:pt x="449810" y="1041088"/>
-                </a:lnTo>
-                <a:lnTo>
-                  <a:pt x="449810" y="666245"/>
-                </a:lnTo>
-                <a:lnTo>
-                  <a:pt x="1748338" y="1415931"/>
+                  <a:pt x="74968" y="1041090"/>
+                </a:lnTo>
+                <a:lnTo>
+                  <a:pt x="449810" y="1257524"/>
+                </a:lnTo>
+                <a:lnTo>
+                  <a:pt x="449810" y="1041090"/>
+                </a:lnTo>
+                <a:lnTo>
+                  <a:pt x="449810" y="666248"/>
+                </a:lnTo>
+                <a:lnTo>
+                  <a:pt x="1748338" y="1415932"/>
                 </a:lnTo>
                 <a:lnTo>
                   <a:pt x="1099036" y="1790774"/>
@@ -1964,103 +1940,97 @@
                   <a:pt x="1124526" y="1790774"/>
                 </a:lnTo>
                 <a:lnTo>
-                  <a:pt x="2423054" y="2540459"/>
-                </a:lnTo>
-                <a:lnTo>
-                  <a:pt x="1773752" y="2915302"/>
-                </a:lnTo>
-                <a:lnTo>
-                  <a:pt x="2398989" y="2915302"/>
-                </a:lnTo>
-                <a:lnTo>
-                  <a:pt x="3048215" y="2540459"/>
+                  <a:pt x="2423054" y="2540458"/>
+                </a:lnTo>
+                <a:lnTo>
+                  <a:pt x="1773752" y="2915301"/>
+                </a:lnTo>
+                <a:lnTo>
+                  <a:pt x="2398989" y="2915301"/>
+                </a:lnTo>
+                <a:lnTo>
+                  <a:pt x="3048215" y="2540458"/>
                 </a:lnTo>
                 <a:lnTo>
                   <a:pt x="1749762" y="1790774"/>
                 </a:lnTo>
                 <a:lnTo>
-                  <a:pt x="2398989" y="1415931"/>
-                </a:lnTo>
-                <a:lnTo>
-                  <a:pt x="2397564" y="1415931"/>
-                </a:lnTo>
-                <a:lnTo>
-                  <a:pt x="1099036" y="666245"/>
-                </a:lnTo>
-                <a:lnTo>
-                  <a:pt x="449810" y="291402"/>
-                </a:lnTo>
-                <a:lnTo>
-                  <a:pt x="74968" y="74968"/>
+                  <a:pt x="2398989" y="1415932"/>
+                </a:lnTo>
+                <a:lnTo>
+                  <a:pt x="2397564" y="1415932"/>
+                </a:lnTo>
+                <a:lnTo>
+                  <a:pt x="1099036" y="666248"/>
+                </a:lnTo>
+                <a:lnTo>
+                  <a:pt x="449810" y="291406"/>
+                </a:lnTo>
+                <a:lnTo>
+                  <a:pt x="74968" y="74972"/>
                 </a:lnTo>
                 <a:close/>
-              </a:path>
-              <a:path w="3123184" h="4114800">
                 <a:moveTo>
-                  <a:pt x="824652" y="2915302"/>
+                  <a:pt x="824652" y="2915301"/>
                 </a:moveTo>
                 <a:lnTo>
-                  <a:pt x="1199494" y="2915302"/>
-                </a:lnTo>
-                <a:lnTo>
-                  <a:pt x="1299952" y="2915302"/>
-                </a:lnTo>
-                <a:lnTo>
-                  <a:pt x="1949178" y="2540459"/>
-                </a:lnTo>
-                <a:lnTo>
-                  <a:pt x="1199494" y="2540459"/>
-                </a:lnTo>
-                <a:lnTo>
-                  <a:pt x="1199494" y="2165617"/>
-                </a:lnTo>
-                <a:lnTo>
-                  <a:pt x="824652" y="1949182"/>
+                  <a:pt x="1199494" y="2915301"/>
+                </a:lnTo>
+                <a:lnTo>
+                  <a:pt x="1299952" y="2915301"/>
+                </a:lnTo>
+                <a:lnTo>
+                  <a:pt x="1949178" y="2540458"/>
+                </a:lnTo>
+                <a:lnTo>
+                  <a:pt x="1199494" y="2540458"/>
+                </a:lnTo>
+                <a:lnTo>
+                  <a:pt x="1199494" y="2165616"/>
+                </a:lnTo>
+                <a:lnTo>
+                  <a:pt x="824652" y="1949183"/>
                 </a:lnTo>
                 <a:close/>
-              </a:path>
-              <a:path w="3123184" h="4114800">
                 <a:moveTo>
-                  <a:pt x="449810" y="1632365"/>
+                  <a:pt x="449810" y="1632366"/>
                 </a:moveTo>
                 <a:lnTo>
-                  <a:pt x="74968" y="1415931"/>
-                </a:lnTo>
-                <a:lnTo>
-                  <a:pt x="74968" y="3290145"/>
-                </a:lnTo>
-                <a:lnTo>
-                  <a:pt x="74968" y="3664988"/>
-                </a:lnTo>
-                <a:lnTo>
-                  <a:pt x="74968" y="4039831"/>
-                </a:lnTo>
-                <a:lnTo>
-                  <a:pt x="1357902" y="4039831"/>
-                </a:lnTo>
-                <a:lnTo>
-                  <a:pt x="1574336" y="3664988"/>
-                </a:lnTo>
-                <a:lnTo>
-                  <a:pt x="449810" y="3664988"/>
-                </a:lnTo>
-                <a:lnTo>
-                  <a:pt x="449810" y="3290145"/>
+                  <a:pt x="74968" y="1415932"/>
+                </a:lnTo>
+                <a:lnTo>
+                  <a:pt x="74968" y="3290143"/>
+                </a:lnTo>
+                <a:lnTo>
+                  <a:pt x="74968" y="3664985"/>
+                </a:lnTo>
+                <a:lnTo>
+                  <a:pt x="74968" y="4039827"/>
+                </a:lnTo>
+                <a:lnTo>
+                  <a:pt x="1357902" y="4039827"/>
+                </a:lnTo>
+                <a:lnTo>
+                  <a:pt x="1574336" y="3664985"/>
+                </a:lnTo>
+                <a:lnTo>
+                  <a:pt x="449810" y="3664985"/>
+                </a:lnTo>
+                <a:lnTo>
+                  <a:pt x="449810" y="3290143"/>
                 </a:lnTo>
                 <a:close/>
-              </a:path>
-              <a:path w="3123184" h="4114800">
                 <a:moveTo>
-                  <a:pt x="1732744" y="4039831"/>
+                  <a:pt x="1732744" y="4039827"/>
                 </a:moveTo>
                 <a:lnTo>
-                  <a:pt x="1949178" y="3664988"/>
-                </a:lnTo>
-                <a:lnTo>
-                  <a:pt x="1724273" y="3664988"/>
-                </a:lnTo>
-                <a:lnTo>
-                  <a:pt x="1507839" y="4039831"/>
+                  <a:pt x="1949178" y="3664985"/>
+                </a:lnTo>
+                <a:lnTo>
+                  <a:pt x="1724273" y="3664985"/>
+                </a:lnTo>
+                <a:lnTo>
+                  <a:pt x="1507839" y="4039827"/>
                 </a:lnTo>
                 <a:close/>
               </a:path>
@@ -2433,19 +2403,19 @@
             <a:pathLst>
               <a:path w="192786" h="254000">
                 <a:moveTo>
-                  <a:pt x="4627" y="17987"/>
+                  <a:pt x="4627" y="17989"/>
                 </a:moveTo>
                 <a:lnTo>
-                  <a:pt x="4627" y="64264"/>
-                </a:lnTo>
-                <a:lnTo>
-                  <a:pt x="27765" y="77624"/>
-                </a:lnTo>
-                <a:lnTo>
-                  <a:pt x="27765" y="64264"/>
-                </a:lnTo>
-                <a:lnTo>
-                  <a:pt x="27765" y="41126"/>
+                  <a:pt x="4627" y="64265"/>
+                </a:lnTo>
+                <a:lnTo>
+                  <a:pt x="27765" y="77625"/>
+                </a:lnTo>
+                <a:lnTo>
+                  <a:pt x="27765" y="64265"/>
+                </a:lnTo>
+                <a:lnTo>
+                  <a:pt x="27765" y="41127"/>
                 </a:lnTo>
                 <a:lnTo>
                   <a:pt x="107920" y="87403"/>
@@ -2457,16 +2427,16 @@
                   <a:pt x="69414" y="110541"/>
                 </a:lnTo>
                 <a:lnTo>
-                  <a:pt x="149568" y="156818"/>
-                </a:lnTo>
-                <a:lnTo>
-                  <a:pt x="109489" y="179956"/>
-                </a:lnTo>
-                <a:lnTo>
-                  <a:pt x="148083" y="179956"/>
-                </a:lnTo>
-                <a:lnTo>
-                  <a:pt x="188158" y="156818"/>
+                  <a:pt x="149568" y="156817"/>
+                </a:lnTo>
+                <a:lnTo>
+                  <a:pt x="109489" y="179955"/>
+                </a:lnTo>
+                <a:lnTo>
+                  <a:pt x="148083" y="179955"/>
+                </a:lnTo>
+                <a:lnTo>
+                  <a:pt x="188158" y="156817"/>
                 </a:lnTo>
                 <a:lnTo>
                   <a:pt x="108008" y="110541"/>
@@ -2478,41 +2448,37 @@
                   <a:pt x="147995" y="87403"/>
                 </a:lnTo>
                 <a:lnTo>
-                  <a:pt x="67840" y="41126"/>
-                </a:lnTo>
-                <a:lnTo>
-                  <a:pt x="27765" y="17987"/>
-                </a:lnTo>
-                <a:lnTo>
-                  <a:pt x="4627" y="4627"/>
+                  <a:pt x="67840" y="41127"/>
+                </a:lnTo>
+                <a:lnTo>
+                  <a:pt x="27765" y="17989"/>
+                </a:lnTo>
+                <a:lnTo>
+                  <a:pt x="4627" y="4629"/>
                 </a:lnTo>
                 <a:close/>
-              </a:path>
-              <a:path w="192786" h="254000">
                 <a:moveTo>
-                  <a:pt x="50903" y="179956"/>
+                  <a:pt x="50903" y="179955"/>
                 </a:moveTo>
                 <a:lnTo>
-                  <a:pt x="74041" y="179956"/>
-                </a:lnTo>
-                <a:lnTo>
-                  <a:pt x="80242" y="179956"/>
-                </a:lnTo>
-                <a:lnTo>
-                  <a:pt x="120317" y="156818"/>
-                </a:lnTo>
-                <a:lnTo>
-                  <a:pt x="74041" y="156818"/>
-                </a:lnTo>
-                <a:lnTo>
-                  <a:pt x="74041" y="133680"/>
-                </a:lnTo>
-                <a:lnTo>
-                  <a:pt x="50903" y="120319"/>
+                  <a:pt x="74041" y="179955"/>
+                </a:lnTo>
+                <a:lnTo>
+                  <a:pt x="80242" y="179955"/>
+                </a:lnTo>
+                <a:lnTo>
+                  <a:pt x="120317" y="156817"/>
+                </a:lnTo>
+                <a:lnTo>
+                  <a:pt x="74041" y="156817"/>
+                </a:lnTo>
+                <a:lnTo>
+                  <a:pt x="74041" y="133679"/>
+                </a:lnTo>
+                <a:lnTo>
+                  <a:pt x="50903" y="120320"/>
                 </a:lnTo>
                 <a:close/>
-              </a:path>
-              <a:path w="192786" h="254000">
                 <a:moveTo>
                   <a:pt x="27765" y="100763"/>
                 </a:moveTo>
@@ -2520,40 +2486,38 @@
                   <a:pt x="4627" y="87403"/>
                 </a:lnTo>
                 <a:lnTo>
-                  <a:pt x="4627" y="203095"/>
-                </a:lnTo>
-                <a:lnTo>
-                  <a:pt x="4627" y="226233"/>
-                </a:lnTo>
-                <a:lnTo>
-                  <a:pt x="4627" y="249372"/>
-                </a:lnTo>
-                <a:lnTo>
-                  <a:pt x="83819" y="249372"/>
-                </a:lnTo>
-                <a:lnTo>
-                  <a:pt x="97179" y="226233"/>
-                </a:lnTo>
-                <a:lnTo>
-                  <a:pt x="27765" y="226233"/>
-                </a:lnTo>
-                <a:lnTo>
-                  <a:pt x="27765" y="203095"/>
+                  <a:pt x="4627" y="203094"/>
+                </a:lnTo>
+                <a:lnTo>
+                  <a:pt x="4627" y="226232"/>
+                </a:lnTo>
+                <a:lnTo>
+                  <a:pt x="4627" y="249370"/>
+                </a:lnTo>
+                <a:lnTo>
+                  <a:pt x="83819" y="249370"/>
+                </a:lnTo>
+                <a:lnTo>
+                  <a:pt x="97179" y="226232"/>
+                </a:lnTo>
+                <a:lnTo>
+                  <a:pt x="27765" y="226232"/>
+                </a:lnTo>
+                <a:lnTo>
+                  <a:pt x="27765" y="203094"/>
                 </a:lnTo>
                 <a:close/>
-              </a:path>
-              <a:path w="192786" h="254000">
                 <a:moveTo>
-                  <a:pt x="106957" y="249372"/>
+                  <a:pt x="106957" y="249370"/>
                 </a:moveTo>
                 <a:lnTo>
-                  <a:pt x="120317" y="226233"/>
-                </a:lnTo>
-                <a:lnTo>
-                  <a:pt x="106434" y="226233"/>
-                </a:lnTo>
-                <a:lnTo>
-                  <a:pt x="93075" y="249372"/>
+                  <a:pt x="120317" y="226232"/>
+                </a:lnTo>
+                <a:lnTo>
+                  <a:pt x="106434" y="226232"/>
+                </a:lnTo>
+                <a:lnTo>
+                  <a:pt x="93075" y="249370"/>
                 </a:lnTo>
                 <a:close/>
               </a:path>
@@ -2847,19 +2811,19 @@
             <a:pathLst>
               <a:path w="192786" h="254000">
                 <a:moveTo>
-                  <a:pt x="4627" y="17987"/>
+                  <a:pt x="4627" y="17989"/>
                 </a:moveTo>
                 <a:lnTo>
-                  <a:pt x="4627" y="64264"/>
-                </a:lnTo>
-                <a:lnTo>
-                  <a:pt x="27765" y="77624"/>
-                </a:lnTo>
-                <a:lnTo>
-                  <a:pt x="27765" y="64264"/>
-                </a:lnTo>
-                <a:lnTo>
-                  <a:pt x="27765" y="41126"/>
+                  <a:pt x="4627" y="64265"/>
+                </a:lnTo>
+                <a:lnTo>
+                  <a:pt x="27765" y="77625"/>
+                </a:lnTo>
+                <a:lnTo>
+                  <a:pt x="27765" y="64265"/>
+                </a:lnTo>
+                <a:lnTo>
+                  <a:pt x="27765" y="41127"/>
                 </a:lnTo>
                 <a:lnTo>
                   <a:pt x="107920" y="87403"/>
@@ -2871,16 +2835,16 @@
                   <a:pt x="69414" y="110541"/>
                 </a:lnTo>
                 <a:lnTo>
-                  <a:pt x="149568" y="156818"/>
-                </a:lnTo>
-                <a:lnTo>
-                  <a:pt x="109489" y="179956"/>
-                </a:lnTo>
-                <a:lnTo>
-                  <a:pt x="148083" y="179956"/>
-                </a:lnTo>
-                <a:lnTo>
-                  <a:pt x="188158" y="156818"/>
+                  <a:pt x="149568" y="156817"/>
+                </a:lnTo>
+                <a:lnTo>
+                  <a:pt x="109489" y="179955"/>
+                </a:lnTo>
+                <a:lnTo>
+                  <a:pt x="148083" y="179955"/>
+                </a:lnTo>
+                <a:lnTo>
+                  <a:pt x="188158" y="156817"/>
                 </a:lnTo>
                 <a:lnTo>
                   <a:pt x="108008" y="110541"/>
@@ -2892,41 +2856,37 @@
                   <a:pt x="147995" y="87403"/>
                 </a:lnTo>
                 <a:lnTo>
-                  <a:pt x="67840" y="41126"/>
-                </a:lnTo>
-                <a:lnTo>
-                  <a:pt x="27765" y="17987"/>
-                </a:lnTo>
-                <a:lnTo>
-                  <a:pt x="4627" y="4627"/>
+                  <a:pt x="67840" y="41127"/>
+                </a:lnTo>
+                <a:lnTo>
+                  <a:pt x="27765" y="17989"/>
+                </a:lnTo>
+                <a:lnTo>
+                  <a:pt x="4627" y="4629"/>
                 </a:lnTo>
                 <a:close/>
-              </a:path>
-              <a:path w="192786" h="254000">
                 <a:moveTo>
-                  <a:pt x="50903" y="179956"/>
+                  <a:pt x="50903" y="179955"/>
                 </a:moveTo>
                 <a:lnTo>
-                  <a:pt x="74041" y="179956"/>
-                </a:lnTo>
-                <a:lnTo>
-                  <a:pt x="80242" y="179956"/>
-                </a:lnTo>
-                <a:lnTo>
-                  <a:pt x="120317" y="156818"/>
-                </a:lnTo>
-                <a:lnTo>
-                  <a:pt x="74041" y="156818"/>
-                </a:lnTo>
-                <a:lnTo>
-                  <a:pt x="74041" y="133680"/>
-                </a:lnTo>
-                <a:lnTo>
-                  <a:pt x="50903" y="120319"/>
+                  <a:pt x="74041" y="179955"/>
+                </a:lnTo>
+                <a:lnTo>
+                  <a:pt x="80242" y="179955"/>
+                </a:lnTo>
+                <a:lnTo>
+                  <a:pt x="120317" y="156817"/>
+                </a:lnTo>
+                <a:lnTo>
+                  <a:pt x="74041" y="156817"/>
+                </a:lnTo>
+                <a:lnTo>
+                  <a:pt x="74041" y="133679"/>
+                </a:lnTo>
+                <a:lnTo>
+                  <a:pt x="50903" y="120320"/>
                 </a:lnTo>
                 <a:close/>
-              </a:path>
-              <a:path w="192786" h="254000">
                 <a:moveTo>
                   <a:pt x="27765" y="100763"/>
                 </a:moveTo>
@@ -2934,40 +2894,38 @@
                   <a:pt x="4627" y="87403"/>
                 </a:lnTo>
                 <a:lnTo>
-                  <a:pt x="4627" y="203095"/>
-                </a:lnTo>
-                <a:lnTo>
-                  <a:pt x="4627" y="226233"/>
-                </a:lnTo>
-                <a:lnTo>
-                  <a:pt x="4627" y="249372"/>
-                </a:lnTo>
-                <a:lnTo>
-                  <a:pt x="83819" y="249372"/>
-                </a:lnTo>
-                <a:lnTo>
-                  <a:pt x="97179" y="226233"/>
-                </a:lnTo>
-                <a:lnTo>
-                  <a:pt x="27765" y="226233"/>
-                </a:lnTo>
-                <a:lnTo>
-                  <a:pt x="27765" y="203095"/>
+                  <a:pt x="4627" y="203094"/>
+                </a:lnTo>
+                <a:lnTo>
+                  <a:pt x="4627" y="226232"/>
+                </a:lnTo>
+                <a:lnTo>
+                  <a:pt x="4627" y="249370"/>
+                </a:lnTo>
+                <a:lnTo>
+                  <a:pt x="83819" y="249370"/>
+                </a:lnTo>
+                <a:lnTo>
+                  <a:pt x="97179" y="226232"/>
+                </a:lnTo>
+                <a:lnTo>
+                  <a:pt x="27765" y="226232"/>
+                </a:lnTo>
+                <a:lnTo>
+                  <a:pt x="27765" y="203094"/>
                 </a:lnTo>
                 <a:close/>
-              </a:path>
-              <a:path w="192786" h="254000">
                 <a:moveTo>
-                  <a:pt x="106957" y="249372"/>
+                  <a:pt x="106957" y="249370"/>
                 </a:moveTo>
                 <a:lnTo>
-                  <a:pt x="120317" y="226233"/>
-                </a:lnTo>
-                <a:lnTo>
-                  <a:pt x="106434" y="226233"/>
-                </a:lnTo>
-                <a:lnTo>
-                  <a:pt x="93075" y="249372"/>
+                  <a:pt x="120317" y="226232"/>
+                </a:lnTo>
+                <a:lnTo>
+                  <a:pt x="106434" y="226232"/>
+                </a:lnTo>
+                <a:lnTo>
+                  <a:pt x="93075" y="249370"/>
                 </a:lnTo>
                 <a:close/>
               </a:path>
